--- a/presentations/PR_L04_CountControlledLoops_Lesson.pptx
+++ b/presentations/PR_L04_CountControlledLoops_Lesson.pptx
@@ -2167,7 +2167,7 @@
                 <a:ea typeface="IBM Plex Sans" pitchFamily="34" charset="-122"/>
                 <a:cs typeface="IBM Plex Sans" pitchFamily="34" charset="-120"/>
               </a:rPr>
-              <a:t>When you know how many times something has to happen, a counting loop does it for you. At the lap counter you will learn to control a for loop and to use the number it counts with.</a:t>
+              <a:t>When you know how many times something has to happen, a counting loop does it for you. Work through the six stations and you will learn to control a for loop and to use the number it counts with.</a:t>
             </a:r>
             <a:endParaRPr lang="en-US" sz="1800" dirty="0"/>
           </a:p>
@@ -2569,7 +2569,7 @@
                 <a:ea typeface="IBM Plex Sans" pitchFamily="34" charset="-122"/>
                 <a:cs typeface="IBM Plex Sans" pitchFamily="34" charset="-120"/>
               </a:rPr>
-              <a:t>Decide what each loop counts before you write it, and name the variable after that.</a:t>
+              <a:t>Decide what each loop counts before you write it, and name the loop variable after that.</a:t>
             </a:r>
             <a:endParaRPr lang="en-US" sz="1700" dirty="0"/>
           </a:p>
@@ -2593,7 +2593,7 @@
                 <a:ea typeface="IBM Plex Sans" pitchFamily="34" charset="-122"/>
                 <a:cs typeface="IBM Plex Sans" pitchFamily="34" charset="-120"/>
               </a:rPr>
-              <a:t>Build the total, the count and the best value in the same single pass through the data.</a:t>
+              <a:t>Build the total, the count and the average from the same single pass through the data.</a:t>
             </a:r>
             <a:endParaRPr lang="en-US" sz="1700" dirty="0"/>
           </a:p>
@@ -2725,7 +2725,7 @@
                 <a:ea typeface="IBM Plex Sans" pitchFamily="34" charset="-122"/>
                 <a:cs typeface="IBM Plex Sans" pitchFamily="34" charset="-120"/>
               </a:rPr>
-              <a:t>Plan the loop, the counter and the total for a report on a set of words.</a:t>
+              <a:t>Which figures can one pass through the data work out at the same time?</a:t>
             </a:r>
             <a:endParaRPr lang="en-US" sz="1600" dirty="0"/>
           </a:p>
@@ -2805,7 +2805,7 @@
                 <a:ea typeface="IBM Plex Sans" pitchFamily="34" charset="-122"/>
                 <a:cs typeface="IBM Plex Sans" pitchFamily="34" charset="-120"/>
               </a:rPr>
-              <a:t>One pass that gathers several answers at once beats looping over the same data again and again.</a:t>
+              <a:t>One pass that gathers several answers at once beats looping over the same data...</a:t>
             </a:r>
             <a:endParaRPr lang="en-US" sz="1600" dirty="0"/>
           </a:p>
@@ -3104,7 +3104,7 @@
                 <a:ea typeface="IBM Plex Sans" pitchFamily="34" charset="-122"/>
                 <a:cs typeface="IBM Plex Sans" pitchFamily="34" charset="-120"/>
               </a:rPr>
-              <a:t>Eight loops are running on the lap counter. Tap the star and sort each one by how many times its block runs.</a:t>
+              <a:t>Eight loops are waiting on the floor below you. Tap the star and sort each one by how many times its block runs.</a:t>
             </a:r>
             <a:endParaRPr lang="en-US" sz="2200" dirty="0"/>
           </a:p>
@@ -4190,7 +4190,7 @@
                 <a:ea typeface="IBM Plex Sans" pitchFamily="34" charset="-122"/>
                 <a:cs typeface="IBM Plex Sans" pitchFamily="34" charset="-120"/>
               </a:rPr>
-              <a:t>Write a program that reads 7 daily rainfall figures in millimetres and prints their total and their mean.</a:t>
+              <a:t>Write a program that reads how many numbers there are, then reads that many whole numbers and prints their total and their average.</a:t>
             </a:r>
             <a:endParaRPr lang="en-US" sz="1700" dirty="0"/>
           </a:p>
@@ -4320,7 +4320,7 @@
                 <a:ea typeface="IBM Plex Sans" pitchFamily="34" charset="-122"/>
                 <a:cs typeface="IBM Plex Sans" pitchFamily="34" charset="-120"/>
               </a:rPr>
-              <a:t>Write a program that reads a size from the user and prints a solid square of hash characters of that size.</a:t>
+              <a:t>Write a program that reads a whole number and prints that many lines, the first holding one * character, the second two, and so on.</a:t>
             </a:r>
             <a:endParaRPr lang="en-US" sz="1700" dirty="0"/>
           </a:p>
@@ -7947,7 +7947,7 @@
                 <a:ea typeface="IBM Plex Sans" pitchFamily="34" charset="-122"/>
                 <a:cs typeface="IBM Plex Sans" pitchFamily="34" charset="-120"/>
               </a:rPr>
-              <a:t>How would you repeat an announcement as many times as the user asks for?</a:t>
+              <a:t>How would you repeat a line as many times as the user asks for?</a:t>
             </a:r>
             <a:endParaRPr lang="en-US" sz="1600" dirty="0"/>
           </a:p>
@@ -8027,7 +8027,7 @@
                 <a:ea typeface="IBM Plex Sans" pitchFamily="34" charset="-122"/>
                 <a:cs typeface="IBM Plex Sans" pitchFamily="34" charset="-120"/>
               </a:rPr>
-              <a:t>Iteration is the proper name for repetition, and it is one of the three basic program structures.</a:t>
+              <a:t>Iteration is the proper name for repetition, and it is one of the three basic...</a:t>
             </a:r>
             <a:endParaRPr lang="en-US" sz="1600" dirty="0"/>
           </a:p>
@@ -8523,7 +8523,7 @@
                 <a:ea typeface="IBM Plex Sans" pitchFamily="34" charset="-122"/>
                 <a:cs typeface="IBM Plex Sans" pitchFamily="34" charset="-120"/>
               </a:rPr>
-              <a:t>What numbers does range(5) actually count through?</a:t>
+              <a:t>What has to change so that a loop counts from 1 up to and including n?</a:t>
             </a:r>
             <a:endParaRPr lang="en-US" sz="1600" dirty="0"/>
           </a:p>
@@ -8603,7 +8603,7 @@
                 <a:ea typeface="IBM Plex Sans" pitchFamily="34" charset="-122"/>
                 <a:cs typeface="IBM Plex Sans" pitchFamily="34" charset="-120"/>
               </a:rPr>
-              <a:t>Counting from 0 is normal in programming, and it is why the first item of a list is item 0.</a:t>
+              <a:t>Counting from 0 is normal in programming, and it is why the first item of a list is item...</a:t>
             </a:r>
             <a:endParaRPr lang="en-US" sz="1600" dirty="0"/>
           </a:p>
@@ -9099,7 +9099,7 @@
                 <a:ea typeface="IBM Plex Sans" pitchFamily="34" charset="-122"/>
                 <a:cs typeface="IBM Plex Sans" pitchFamily="34" charset="-120"/>
               </a:rPr>
-              <a:t>Which range lists the hall rows from 4 to 9 inclusive?</a:t>
+              <a:t>Which range counts through 4 to 9, with both of them included?</a:t>
             </a:r>
             <a:endParaRPr lang="en-US" sz="1600" dirty="0"/>
           </a:p>
@@ -9179,7 +9179,7 @@
                 <a:ea typeface="IBM Plex Sans" pitchFamily="34" charset="-122"/>
                 <a:cs typeface="IBM Plex Sans" pitchFamily="34" charset="-120"/>
               </a:rPr>
-              <a:t>A range does not build a list of its numbers: it works each one out as the loop asks for it.</a:t>
+              <a:t>The stop value of a range is the one value the loop never...</a:t>
             </a:r>
             <a:endParaRPr lang="en-US" sz="1600" dirty="0"/>
           </a:p>
@@ -9755,7 +9755,7 @@
                 <a:ea typeface="IBM Plex Sans" pitchFamily="34" charset="-122"/>
                 <a:cs typeface="IBM Plex Sans" pitchFamily="34" charset="-120"/>
               </a:rPr>
-              <a:t>A counter and a running total work the same way: one adds 1, the other adds a value.</a:t>
+              <a:t>A counter and a running total work the same way: one adds 1 and the other adds...</a:t>
             </a:r>
             <a:endParaRPr lang="en-US" sz="1600" dirty="0"/>
           </a:p>
@@ -10331,7 +10331,7 @@
                 <a:ea typeface="IBM Plex Sans" pitchFamily="34" charset="-122"/>
                 <a:cs typeface="IBM Plex Sans" pitchFamily="34" charset="-120"/>
               </a:rPr>
-              <a:t>Two nested loops of 10 run 100 times, so nesting multiplies the work rather than adding to it.</a:t>
+              <a:t>Nesting one loop inside another multiplies the work rather than...</a:t>
             </a:r>
             <a:endParaRPr lang="en-US" sz="1600" dirty="0"/>
           </a:p>

--- a/presentations/PR_L04_CountControlledLoops_Lesson.pptx
+++ b/presentations/PR_L04_CountControlledLoops_Lesson.pptx
@@ -4060,7 +4060,262 @@
                 <a:ea typeface="IBM Plex Sans" pitchFamily="34" charset="-122"/>
                 <a:cs typeface="IBM Plex Sans" pitchFamily="34" charset="-120"/>
               </a:rPr>
-              <a:t>A program should print the numbers 1 to 10 but prints 0 to 9 instead. Its loop begins for i in range(10). State which values the original range() counted through, and rewrite the line so the loop prints 1 to 10.</a:t>
+              <a:t>A program should print the numbers 1 to 10 but prints 0 to 9 instead. Its loop begins </a:t>
+            </a:r>
+            <a:pPr indent="0" marL="0">
+              <a:lnSpc>
+                <a:spcPct val="118000"/>
+              </a:lnSpc>
+              <a:buNone/>
+            </a:pPr>
+            <a:r>
+              <a:rPr lang="en-US" sz="1700" dirty="0">
+                <a:solidFill>
+                  <a:srgbClr val="6B21A8"/>
+                </a:solidFill>
+                <a:latin typeface="IBM Plex Mono" pitchFamily="34" charset="0"/>
+                <a:ea typeface="IBM Plex Mono" pitchFamily="34" charset="-122"/>
+                <a:cs typeface="IBM Plex Mono" pitchFamily="34" charset="-120"/>
+              </a:rPr>
+              <a:t>for</a:t>
+            </a:r>
+            <a:pPr indent="0" marL="0">
+              <a:lnSpc>
+                <a:spcPct val="118000"/>
+              </a:lnSpc>
+              <a:buNone/>
+            </a:pPr>
+            <a:r>
+              <a:rPr lang="en-US" sz="1700" dirty="0">
+                <a:solidFill>
+                  <a:srgbClr val="18181B"/>
+                </a:solidFill>
+                <a:latin typeface="IBM Plex Mono" pitchFamily="34" charset="0"/>
+                <a:ea typeface="IBM Plex Mono" pitchFamily="34" charset="-122"/>
+                <a:cs typeface="IBM Plex Mono" pitchFamily="34" charset="-120"/>
+              </a:rPr>
+              <a:t> </a:t>
+            </a:r>
+            <a:pPr indent="0" marL="0">
+              <a:lnSpc>
+                <a:spcPct val="118000"/>
+              </a:lnSpc>
+              <a:buNone/>
+            </a:pPr>
+            <a:r>
+              <a:rPr lang="en-US" sz="1700" dirty="0">
+                <a:solidFill>
+                  <a:srgbClr val="18181B"/>
+                </a:solidFill>
+                <a:latin typeface="IBM Plex Mono" pitchFamily="34" charset="0"/>
+                <a:ea typeface="IBM Plex Mono" pitchFamily="34" charset="-122"/>
+                <a:cs typeface="IBM Plex Mono" pitchFamily="34" charset="-120"/>
+              </a:rPr>
+              <a:t>i</a:t>
+            </a:r>
+            <a:pPr indent="0" marL="0">
+              <a:lnSpc>
+                <a:spcPct val="118000"/>
+              </a:lnSpc>
+              <a:buNone/>
+            </a:pPr>
+            <a:r>
+              <a:rPr lang="en-US" sz="1700" dirty="0">
+                <a:solidFill>
+                  <a:srgbClr val="18181B"/>
+                </a:solidFill>
+                <a:latin typeface="IBM Plex Mono" pitchFamily="34" charset="0"/>
+                <a:ea typeface="IBM Plex Mono" pitchFamily="34" charset="-122"/>
+                <a:cs typeface="IBM Plex Mono" pitchFamily="34" charset="-120"/>
+              </a:rPr>
+              <a:t> </a:t>
+            </a:r>
+            <a:pPr indent="0" marL="0">
+              <a:lnSpc>
+                <a:spcPct val="118000"/>
+              </a:lnSpc>
+              <a:buNone/>
+            </a:pPr>
+            <a:r>
+              <a:rPr lang="en-US" sz="1700" dirty="0">
+                <a:solidFill>
+                  <a:srgbClr val="6B21A8"/>
+                </a:solidFill>
+                <a:latin typeface="IBM Plex Mono" pitchFamily="34" charset="0"/>
+                <a:ea typeface="IBM Plex Mono" pitchFamily="34" charset="-122"/>
+                <a:cs typeface="IBM Plex Mono" pitchFamily="34" charset="-120"/>
+              </a:rPr>
+              <a:t>in</a:t>
+            </a:r>
+            <a:pPr indent="0" marL="0">
+              <a:lnSpc>
+                <a:spcPct val="118000"/>
+              </a:lnSpc>
+              <a:buNone/>
+            </a:pPr>
+            <a:r>
+              <a:rPr lang="en-US" sz="1700" dirty="0">
+                <a:solidFill>
+                  <a:srgbClr val="18181B"/>
+                </a:solidFill>
+                <a:latin typeface="IBM Plex Mono" pitchFamily="34" charset="0"/>
+                <a:ea typeface="IBM Plex Mono" pitchFamily="34" charset="-122"/>
+                <a:cs typeface="IBM Plex Mono" pitchFamily="34" charset="-120"/>
+              </a:rPr>
+              <a:t> </a:t>
+            </a:r>
+            <a:pPr indent="0" marL="0">
+              <a:lnSpc>
+                <a:spcPct val="118000"/>
+              </a:lnSpc>
+              <a:buNone/>
+            </a:pPr>
+            <a:r>
+              <a:rPr lang="en-US" sz="1700" dirty="0">
+                <a:solidFill>
+                  <a:srgbClr val="1D4ED8"/>
+                </a:solidFill>
+                <a:latin typeface="IBM Plex Mono" pitchFamily="34" charset="0"/>
+                <a:ea typeface="IBM Plex Mono" pitchFamily="34" charset="-122"/>
+                <a:cs typeface="IBM Plex Mono" pitchFamily="34" charset="-120"/>
+              </a:rPr>
+              <a:t>range</a:t>
+            </a:r>
+            <a:pPr indent="0" marL="0">
+              <a:lnSpc>
+                <a:spcPct val="118000"/>
+              </a:lnSpc>
+              <a:buNone/>
+            </a:pPr>
+            <a:r>
+              <a:rPr lang="en-US" sz="1700" dirty="0">
+                <a:solidFill>
+                  <a:srgbClr val="3F3F46"/>
+                </a:solidFill>
+                <a:latin typeface="IBM Plex Mono" pitchFamily="34" charset="0"/>
+                <a:ea typeface="IBM Plex Mono" pitchFamily="34" charset="-122"/>
+                <a:cs typeface="IBM Plex Mono" pitchFamily="34" charset="-120"/>
+              </a:rPr>
+              <a:t>(</a:t>
+            </a:r>
+            <a:pPr indent="0" marL="0">
+              <a:lnSpc>
+                <a:spcPct val="118000"/>
+              </a:lnSpc>
+              <a:buNone/>
+            </a:pPr>
+            <a:r>
+              <a:rPr lang="en-US" sz="1700" dirty="0">
+                <a:solidFill>
+                  <a:srgbClr val="9A3412"/>
+                </a:solidFill>
+                <a:latin typeface="IBM Plex Mono" pitchFamily="34" charset="0"/>
+                <a:ea typeface="IBM Plex Mono" pitchFamily="34" charset="-122"/>
+                <a:cs typeface="IBM Plex Mono" pitchFamily="34" charset="-120"/>
+              </a:rPr>
+              <a:t>10</a:t>
+            </a:r>
+            <a:pPr indent="0" marL="0">
+              <a:lnSpc>
+                <a:spcPct val="118000"/>
+              </a:lnSpc>
+              <a:buNone/>
+            </a:pPr>
+            <a:r>
+              <a:rPr lang="en-US" sz="1700" dirty="0">
+                <a:solidFill>
+                  <a:srgbClr val="3F3F46"/>
+                </a:solidFill>
+                <a:latin typeface="IBM Plex Mono" pitchFamily="34" charset="0"/>
+                <a:ea typeface="IBM Plex Mono" pitchFamily="34" charset="-122"/>
+                <a:cs typeface="IBM Plex Mono" pitchFamily="34" charset="-120"/>
+              </a:rPr>
+              <a:t>)</a:t>
+            </a:r>
+            <a:pPr indent="0" marL="0">
+              <a:lnSpc>
+                <a:spcPct val="118000"/>
+              </a:lnSpc>
+              <a:buNone/>
+            </a:pPr>
+            <a:r>
+              <a:rPr lang="en-US" sz="1700" dirty="0">
+                <a:solidFill>
+                  <a:srgbClr val="101828"/>
+                </a:solidFill>
+                <a:latin typeface="IBM Plex Sans" pitchFamily="34" charset="0"/>
+                <a:ea typeface="IBM Plex Sans" pitchFamily="34" charset="-122"/>
+                <a:cs typeface="IBM Plex Sans" pitchFamily="34" charset="-120"/>
+              </a:rPr>
+              <a:t>. State which values the original </a:t>
+            </a:r>
+            <a:pPr indent="0" marL="0">
+              <a:lnSpc>
+                <a:spcPct val="118000"/>
+              </a:lnSpc>
+              <a:buNone/>
+            </a:pPr>
+            <a:r>
+              <a:rPr lang="en-US" sz="1700" dirty="0">
+                <a:solidFill>
+                  <a:srgbClr val="1D4ED8"/>
+                </a:solidFill>
+                <a:latin typeface="IBM Plex Mono" pitchFamily="34" charset="0"/>
+                <a:ea typeface="IBM Plex Mono" pitchFamily="34" charset="-122"/>
+                <a:cs typeface="IBM Plex Mono" pitchFamily="34" charset="-120"/>
+              </a:rPr>
+              <a:t>range</a:t>
+            </a:r>
+            <a:pPr indent="0" marL="0">
+              <a:lnSpc>
+                <a:spcPct val="118000"/>
+              </a:lnSpc>
+              <a:buNone/>
+            </a:pPr>
+            <a:r>
+              <a:rPr lang="en-US" sz="1700" dirty="0">
+                <a:solidFill>
+                  <a:srgbClr val="3F3F46"/>
+                </a:solidFill>
+                <a:latin typeface="IBM Plex Mono" pitchFamily="34" charset="0"/>
+                <a:ea typeface="IBM Plex Mono" pitchFamily="34" charset="-122"/>
+                <a:cs typeface="IBM Plex Mono" pitchFamily="34" charset="-120"/>
+              </a:rPr>
+              <a:t>(</a:t>
+            </a:r>
+            <a:pPr indent="0" marL="0">
+              <a:lnSpc>
+                <a:spcPct val="118000"/>
+              </a:lnSpc>
+              <a:buNone/>
+            </a:pPr>
+            <a:r>
+              <a:rPr lang="en-US" sz="1700" dirty="0">
+                <a:solidFill>
+                  <a:srgbClr val="3F3F46"/>
+                </a:solidFill>
+                <a:latin typeface="IBM Plex Mono" pitchFamily="34" charset="0"/>
+                <a:ea typeface="IBM Plex Mono" pitchFamily="34" charset="-122"/>
+                <a:cs typeface="IBM Plex Mono" pitchFamily="34" charset="-120"/>
+              </a:rPr>
+              <a:t>)</a:t>
+            </a:r>
+            <a:pPr indent="0" marL="0">
+              <a:lnSpc>
+                <a:spcPct val="118000"/>
+              </a:lnSpc>
+              <a:buNone/>
+            </a:pPr>
+            <a:r>
+              <a:rPr lang="en-US" sz="1700" dirty="0">
+                <a:solidFill>
+                  <a:srgbClr val="101828"/>
+                </a:solidFill>
+                <a:latin typeface="IBM Plex Sans" pitchFamily="34" charset="0"/>
+                <a:ea typeface="IBM Plex Sans" pitchFamily="34" charset="-122"/>
+                <a:cs typeface="IBM Plex Sans" pitchFamily="34" charset="-120"/>
+              </a:rPr>
+              <a:t> counted through, and rewrite the line so the loop prints 1 to 10.</a:t>
             </a:r>
             <a:endParaRPr lang="en-US" sz="1700" dirty="0"/>
           </a:p>

--- a/presentations/PR_L04_CountControlledLoops_Lesson.pptx
+++ b/presentations/PR_L04_CountControlledLoops_Lesson.pptx
@@ -19,9 +19,10 @@
     <p:sldId id="267" r:id="rId13"/>
     <p:sldId id="268" r:id="rId14"/>
     <p:sldId id="269" r:id="rId15"/>
+    <p:sldId id="270" r:id="rId16"/>
   </p:sldIdLst>
   <p:notesMasterIdLst>
-    <p:notesMasterId r:id="rId16"/>
+    <p:notesMasterId r:id="rId17"/>
   </p:notesMasterIdLst>
   <p:sldSz cx="12192000" cy="6858000"/>
   <p:notesSz cx="6858000" cy="12192000"/>
@@ -692,7 +693,15 @@
           <a:p>
             <a:r>
               <a:rPr lang="en-US" dirty="0"/>
-              <a:t>Make them commit to an answer on paper before they tap the star. Guessing first costs them the learning.</a:t>
+              <a:t>The answer is B: 1
+4
+7.
+Do not say it yet. Every pupil commits first - fingers, whiteboards or a show of hands on each letter in turn - and you count the split before anyone can change their mind.
+IF MOST OF THE CLASS IS RIGHT: say why it is right in one sentence and go straight on to the independent work.
+IF A SIGNIFICANT GROUP IS ON ONE WRONG LETTER: that option is the misconception to teach against before anyone goes on. Go back to station 3, Choosing the range, and work through its example again, aloud, with the class watching, then re-ask this question.
+The course's own response to a wrong answer here: The step of 3 jumps from 1 to 4 to 7. The next jump would be 10, which is the stop, so the loop ends.
+A limitation, stated rather than papered over: one response covers every wrong option; it does not say what to revisit for each one. The course does not record what each separate wrong option means, and this slide does not invent it. Decide your own reteach for each option before the lesson; the options above are the start of it.
+This is a real activity from the experience (pr-l04-s3-c6), so the wording here is the wording a pupil will see.</a:t>
             </a:r>
             <a:endParaRPr lang="en-US" dirty="0"/>
           </a:p>
@@ -780,7 +789,7 @@
           <a:p>
             <a:r>
               <a:rPr lang="en-US" dirty="0"/>
-              <a:t>Use these as a settler, or as something for early finishers to read in the experience.</a:t>
+              <a:t>Make them commit to an answer on paper before they tap the star. Guessing first costs them the learning.</a:t>
             </a:r>
             <a:endParaRPr lang="en-US" dirty="0"/>
           </a:p>
@@ -868,7 +877,7 @@
           <a:p>
             <a:r>
               <a:rPr lang="en-US" dirty="0"/>
-              <a:t>Timed and silent. Mark against the answer sheet, then ask students to record their weakest area.</a:t>
+              <a:t>Use these as a settler, or as something for early finishers to read in the experience.</a:t>
             </a:r>
             <a:endParaRPr lang="en-US" dirty="0"/>
           </a:p>
@@ -956,7 +965,7 @@
           <a:p>
             <a:r>
               <a:rPr lang="en-US" dirty="0"/>
-              <a:t>Students copy their score-screen breakdown onto the worksheet, then rate themselves here.</a:t>
+              <a:t>Timed and silent. Mark against the answer sheet, then ask students to record their weakest area.</a:t>
             </a:r>
             <a:endParaRPr lang="en-US" dirty="0"/>
           </a:p>
@@ -980,6 +989,94 @@
             <a:fld id="{F7021451-1387-4CA6-816F-3879F97B5CBC}" type="slidenum">
               <a:rPr lang="en-US"/>
               <a:t>14</a:t>
+            </a:fld>
+            <a:endParaRPr lang="en-US"/>
+          </a:p>
+        </p:txBody>
+      </p:sp>
+    </p:spTree>
+    <p:extLst>
+      <p:ext uri="{BB962C8B-B14F-4D97-AF65-F5344CB8AC3E}">
+        <p14:creationId xmlns:p14="http://schemas.microsoft.com/office/powerpoint/2010/main" val="1024086991"/>
+      </p:ext>
+    </p:extLst>
+  </p:cSld>
+  <p:clrMapOvr>
+    <a:masterClrMapping/>
+  </p:clrMapOvr>
+</p:notes>
+</file>
+
+<file path=ppt/notesSlides/notesSlide15.xml><?xml version="1.0" encoding="utf-8"?>
+<p:notes xmlns:a="http://schemas.openxmlformats.org/drawingml/2006/main" xmlns:r="http://schemas.openxmlformats.org/officeDocument/2006/relationships" xmlns:p="http://schemas.openxmlformats.org/presentationml/2006/main">
+  <p:cSld>
+    <p:spTree>
+      <p:nvGrpSpPr>
+        <p:cNvPr id="1" name=""/>
+        <p:cNvGrpSpPr/>
+        <p:nvPr/>
+      </p:nvGrpSpPr>
+      <p:grpSpPr>
+        <a:xfrm>
+          <a:off x="0" y="0"/>
+          <a:ext cx="0" cy="0"/>
+          <a:chOff x="0" y="0"/>
+          <a:chExt cx="0" cy="0"/>
+        </a:xfrm>
+      </p:grpSpPr>
+      <p:sp>
+        <p:nvSpPr>
+          <p:cNvPr id="2" name="Slide Image Placeholder 1"/>
+          <p:cNvSpPr>
+            <a:spLocks noGrp="1" noRot="1" noChangeAspect="1"/>
+          </p:cNvSpPr>
+          <p:nvPr>
+            <p:ph type="sldImg"/>
+          </p:nvPr>
+        </p:nvSpPr>
+        <p:spPr/>
+      </p:sp>
+      <p:sp>
+        <p:nvSpPr>
+          <p:cNvPr id="3" name="Notes Placeholder 2"/>
+          <p:cNvSpPr>
+            <a:spLocks noGrp="1"/>
+          </p:cNvSpPr>
+          <p:nvPr>
+            <p:ph type="body" idx="1"/>
+          </p:nvPr>
+        </p:nvSpPr>
+        <p:spPr/>
+        <p:txBody>
+          <a:bodyPr/>
+          <a:lstStyle/>
+          <a:p>
+            <a:r>
+              <a:rPr lang="en-US" dirty="0"/>
+              <a:t>Students copy their score-screen breakdown onto the worksheet, then rate themselves here.</a:t>
+            </a:r>
+            <a:endParaRPr lang="en-US" dirty="0"/>
+          </a:p>
+        </p:txBody>
+      </p:sp>
+      <p:sp>
+        <p:nvSpPr>
+          <p:cNvPr id="4" name="Slide Number Placeholder 3"/>
+          <p:cNvSpPr>
+            <a:spLocks noGrp="1"/>
+          </p:cNvSpPr>
+          <p:nvPr>
+            <p:ph type="sldNum" sz="quarter" idx="10"/>
+          </p:nvPr>
+        </p:nvSpPr>
+        <p:spPr/>
+        <p:txBody>
+          <a:bodyPr/>
+          <a:lstStyle/>
+          <a:p>
+            <a:fld id="{F7021451-1387-4CA6-816F-3879F97B5CBC}" type="slidenum">
+              <a:rPr lang="en-US"/>
+              <a:t>15</a:t>
             </a:fld>
             <a:endParaRPr lang="en-US"/>
           </a:p>
@@ -2949,12 +3046,12 @@
         </p:nvSpPr>
         <p:spPr>
           <a:xfrm>
-            <a:off x="502920" y="438912"/>
-            <a:ext cx="3108960" cy="502920"/>
+            <a:off x="502920" y="457200"/>
+            <a:ext cx="1051560" cy="420624"/>
           </a:xfrm>
           <a:prstGeom prst="roundRect">
             <a:avLst>
-              <a:gd name="adj" fmla="val 18182"/>
+              <a:gd name="adj" fmla="val 21739"/>
             </a:avLst>
           </a:prstGeom>
           <a:solidFill>
@@ -2971,8 +3068,8 @@
         </p:nvSpPr>
         <p:spPr>
           <a:xfrm>
-            <a:off x="502920" y="438912"/>
-            <a:ext cx="3108960" cy="502920"/>
+            <a:off x="502920" y="457200"/>
+            <a:ext cx="1051560" cy="420624"/>
           </a:xfrm>
           <a:prstGeom prst="rect">
             <a:avLst/>
@@ -2988,7 +3085,7 @@
               <a:buNone/>
             </a:pPr>
             <a:r>
-              <a:rPr lang="en-US" sz="1300" b="1" dirty="0">
+              <a:rPr lang="en-US" sz="1200" b="1" dirty="0">
                 <a:solidFill>
                   <a:srgbClr val="101828"/>
                 </a:solidFill>
@@ -2996,9 +3093,9 @@
                 <a:ea typeface="IBM Plex Mono" pitchFamily="34" charset="-122"/>
                 <a:cs typeface="IBM Plex Mono" pitchFamily="34" charset="-120"/>
               </a:rPr>
-              <a:t>★  FINAL CHALLENGE</a:t>
-            </a:r>
-            <a:endParaRPr lang="en-US" sz="1300" dirty="0"/>
+              <a:t>CHECK</a:t>
+            </a:r>
+            <a:endParaRPr lang="en-US" sz="1200" dirty="0"/>
           </a:p>
         </p:txBody>
       </p:sp>
@@ -3010,51 +3107,93 @@
         </p:nvSpPr>
         <p:spPr>
           <a:xfrm>
-            <a:off x="502920" y="1097280"/>
-            <a:ext cx="11155680" cy="731520"/>
-          </a:xfrm>
-          <a:prstGeom prst="rect">
-            <a:avLst/>
-          </a:prstGeom>
-          <a:noFill/>
-          <a:ln/>
-        </p:spPr>
-        <p:txBody>
-          <a:bodyPr wrap="square" lIns="0" tIns="0" rIns="0" bIns="0" rtlCol="0" anchor="ctr"/>
-          <a:lstStyle/>
-          <a:p>
-            <a:pPr indent="0" marL="0">
-              <a:buNone/>
-            </a:pPr>
-            <a:r>
-              <a:rPr lang="en-US" sz="3400" b="1" dirty="0">
-                <a:solidFill>
-                  <a:srgbClr val="101828"/>
+            <a:off x="1737360" y="457200"/>
+            <a:ext cx="9875520" cy="420624"/>
+          </a:xfrm>
+          <a:prstGeom prst="rect">
+            <a:avLst/>
+          </a:prstGeom>
+          <a:noFill/>
+          <a:ln/>
+        </p:spPr>
+        <p:txBody>
+          <a:bodyPr wrap="square" lIns="0" tIns="0" rIns="0" bIns="0" rtlCol="0" anchor="ctr"/>
+          <a:lstStyle/>
+          <a:p>
+            <a:pPr indent="0" marL="0">
+              <a:buNone/>
+            </a:pPr>
+            <a:r>
+              <a:rPr lang="en-US" sz="1500" dirty="0">
+                <a:solidFill>
+                  <a:srgbClr val="667085"/>
                 </a:solidFill>
                 <a:latin typeface="IBM Plex Sans" pitchFamily="34" charset="0"/>
                 <a:ea typeface="IBM Plex Sans" pitchFamily="34" charset="-122"/>
                 <a:cs typeface="IBM Plex Sans" pitchFamily="34" charset="-120"/>
               </a:rPr>
-              <a:t>How many times?</a:t>
-            </a:r>
-            <a:endParaRPr lang="en-US" sz="3400" dirty="0"/>
-          </a:p>
-        </p:txBody>
-      </p:sp>
-      <p:sp>
-        <p:nvSpPr>
-          <p:cNvPr id="8" name="Shape 6"/>
+              <a:t>Hands down. Everyone commits.</a:t>
+            </a:r>
+            <a:endParaRPr lang="en-US" sz="1500" dirty="0"/>
+          </a:p>
+        </p:txBody>
+      </p:sp>
+      <p:sp>
+        <p:nvSpPr>
+          <p:cNvPr id="8" name="Text 6"/>
+          <p:cNvSpPr txBox="1"/>
+          <p:nvPr/>
+        </p:nvSpPr>
+        <p:spPr>
+          <a:xfrm>
+            <a:off x="502920" y="1097280"/>
+            <a:ext cx="11155680" cy="914400"/>
+          </a:xfrm>
+          <a:prstGeom prst="rect">
+            <a:avLst/>
+          </a:prstGeom>
+          <a:noFill/>
+          <a:ln/>
+        </p:spPr>
+        <p:txBody>
+          <a:bodyPr wrap="square" lIns="0" tIns="0" rIns="0" bIns="0" rtlCol="0" anchor="ctr"/>
+          <a:lstStyle/>
+          <a:p>
+            <a:pPr indent="0" marL="0">
+              <a:lnSpc>
+                <a:spcPct val="115000"/>
+              </a:lnSpc>
+              <a:buNone/>
+            </a:pPr>
+            <a:r>
+              <a:rPr lang="en-US" sz="2600" b="1" dirty="0">
+                <a:solidFill>
+                  <a:srgbClr val="101828"/>
+                </a:solidFill>
+                <a:latin typeface="IBM Plex Sans" pitchFamily="34" charset="0"/>
+                <a:ea typeface="IBM Plex Sans" pitchFamily="34" charset="-122"/>
+                <a:cs typeface="IBM Plex Sans" pitchFamily="34" charset="-120"/>
+              </a:rPr>
+              <a:t>What will this program display?</a:t>
+            </a:r>
+            <a:endParaRPr lang="en-US" sz="2600" dirty="0"/>
+          </a:p>
+        </p:txBody>
+      </p:sp>
+      <p:sp>
+        <p:nvSpPr>
+          <p:cNvPr id="9" name="Shape 7"/>
           <p:cNvSpPr/>
           <p:nvPr/>
         </p:nvSpPr>
         <p:spPr>
           <a:xfrm>
-            <a:off x="502920" y="2011680"/>
-            <a:ext cx="11155680" cy="2194560"/>
+            <a:off x="502920" y="2148840"/>
+            <a:ext cx="5029200" cy="1005840"/>
           </a:xfrm>
           <a:prstGeom prst="roundRect">
             <a:avLst>
-              <a:gd name="adj" fmla="val 5000"/>
+              <a:gd name="adj" fmla="val 10909"/>
             </a:avLst>
           </a:prstGeom>
           <a:solidFill>
@@ -3062,7 +3201,7 @@
           </a:solidFill>
           <a:ln w="15875">
             <a:solidFill>
-              <a:srgbClr val="2D63FF"/>
+              <a:srgbClr val="D9DEE7"/>
             </a:solidFill>
             <a:prstDash val="solid"/>
           </a:ln>
@@ -3070,33 +3209,183 @@
       </p:sp>
       <p:sp>
         <p:nvSpPr>
-          <p:cNvPr id="9" name="Text 7"/>
-          <p:cNvSpPr txBox="1"/>
-          <p:nvPr/>
-        </p:nvSpPr>
-        <p:spPr>
-          <a:xfrm>
-            <a:off x="1005840" y="2331720"/>
-            <a:ext cx="10149840" cy="1554480"/>
-          </a:xfrm>
-          <a:prstGeom prst="rect">
-            <a:avLst/>
-          </a:prstGeom>
-          <a:noFill/>
-          <a:ln/>
-        </p:spPr>
-        <p:txBody>
-          <a:bodyPr wrap="square" lIns="0" tIns="0" rIns="0" bIns="0" rtlCol="0" anchor="ctr"/>
+          <p:cNvPr id="10" name="Text 8"/>
+          <p:cNvSpPr txBox="1"/>
+          <p:nvPr/>
+        </p:nvSpPr>
+        <p:spPr>
+          <a:xfrm>
+            <a:off x="822960" y="2350008"/>
+            <a:ext cx="4480560" cy="603504"/>
+          </a:xfrm>
+          <a:prstGeom prst="rect">
+            <a:avLst/>
+          </a:prstGeom>
+          <a:noFill/>
+          <a:ln/>
+        </p:spPr>
+        <p:txBody>
+          <a:bodyPr wrap="square" lIns="0" tIns="0" rIns="0" bIns="0" rtlCol="0" anchor="t"/>
           <a:lstStyle/>
           <a:p>
             <a:pPr indent="0" marL="0">
               <a:lnSpc>
-                <a:spcPct val="130000"/>
+                <a:spcPct val="125000"/>
               </a:lnSpc>
               <a:buNone/>
             </a:pPr>
             <a:r>
-              <a:rPr lang="en-US" sz="2200" dirty="0">
+              <a:rPr lang="en-US" sz="1500" dirty="0">
+                <a:solidFill>
+                  <a:srgbClr val="101828"/>
+                </a:solidFill>
+                <a:latin typeface="IBM Plex Mono" pitchFamily="34" charset="0"/>
+                <a:ea typeface="IBM Plex Mono" pitchFamily="34" charset="-122"/>
+                <a:cs typeface="IBM Plex Mono" pitchFamily="34" charset="-120"/>
+              </a:rPr>
+              <a:t>for n in range(1, 10, 3):</a:t>
+            </a:r>
+            <a:endParaRPr lang="en-US" sz="1500" dirty="0"/>
+          </a:p>
+          <a:p>
+            <a:pPr indent="0" marL="0">
+              <a:lnSpc>
+                <a:spcPct val="125000"/>
+              </a:lnSpc>
+              <a:buNone/>
+            </a:pPr>
+            <a:r>
+              <a:rPr lang="en-US" sz="1500" dirty="0">
+                <a:solidFill>
+                  <a:srgbClr val="101828"/>
+                </a:solidFill>
+                <a:latin typeface="IBM Plex Mono" pitchFamily="34" charset="0"/>
+                <a:ea typeface="IBM Plex Mono" pitchFamily="34" charset="-122"/>
+                <a:cs typeface="IBM Plex Mono" pitchFamily="34" charset="-120"/>
+              </a:rPr>
+              <a:t>    print(n)</a:t>
+            </a:r>
+            <a:endParaRPr lang="en-US" sz="1500" dirty="0"/>
+          </a:p>
+        </p:txBody>
+      </p:sp>
+      <p:sp>
+        <p:nvSpPr>
+          <p:cNvPr id="11" name="Shape 9"/>
+          <p:cNvSpPr/>
+          <p:nvPr/>
+        </p:nvSpPr>
+        <p:spPr>
+          <a:xfrm>
+            <a:off x="5806440" y="2148840"/>
+            <a:ext cx="5852160" cy="731520"/>
+          </a:xfrm>
+          <a:prstGeom prst="roundRect">
+            <a:avLst>
+              <a:gd name="adj" fmla="val 15000"/>
+            </a:avLst>
+          </a:prstGeom>
+          <a:solidFill>
+            <a:srgbClr val="FFFFFF"/>
+          </a:solidFill>
+          <a:ln w="15875">
+            <a:solidFill>
+              <a:srgbClr val="D9DEE7"/>
+            </a:solidFill>
+            <a:prstDash val="solid"/>
+          </a:ln>
+        </p:spPr>
+      </p:sp>
+      <p:sp>
+        <p:nvSpPr>
+          <p:cNvPr id="12" name="Shape 10"/>
+          <p:cNvSpPr/>
+          <p:nvPr/>
+        </p:nvSpPr>
+        <p:spPr>
+          <a:xfrm>
+            <a:off x="6080760" y="2295144"/>
+            <a:ext cx="438912" cy="438912"/>
+          </a:xfrm>
+          <a:prstGeom prst="roundRect">
+            <a:avLst>
+              <a:gd name="adj" fmla="val 20833"/>
+            </a:avLst>
+          </a:prstGeom>
+          <a:solidFill>
+            <a:srgbClr val="EEF2FB"/>
+          </a:solidFill>
+          <a:ln/>
+        </p:spPr>
+      </p:sp>
+      <p:sp>
+        <p:nvSpPr>
+          <p:cNvPr id="13" name="Text 11"/>
+          <p:cNvSpPr txBox="1"/>
+          <p:nvPr/>
+        </p:nvSpPr>
+        <p:spPr>
+          <a:xfrm>
+            <a:off x="6080760" y="2295144"/>
+            <a:ext cx="438912" cy="438912"/>
+          </a:xfrm>
+          <a:prstGeom prst="rect">
+            <a:avLst/>
+          </a:prstGeom>
+          <a:noFill/>
+          <a:ln/>
+        </p:spPr>
+        <p:txBody>
+          <a:bodyPr wrap="square" lIns="0" tIns="0" rIns="0" bIns="0" rtlCol="0" anchor="ctr"/>
+          <a:lstStyle/>
+          <a:p>
+            <a:pPr algn="ctr" indent="0" marL="0">
+              <a:buNone/>
+            </a:pPr>
+            <a:r>
+              <a:rPr lang="en-US" sz="1300" b="1" dirty="0">
+                <a:solidFill>
+                  <a:srgbClr val="2D63FF"/>
+                </a:solidFill>
+                <a:latin typeface="IBM Plex Mono" pitchFamily="34" charset="0"/>
+                <a:ea typeface="IBM Plex Mono" pitchFamily="34" charset="-122"/>
+                <a:cs typeface="IBM Plex Mono" pitchFamily="34" charset="-120"/>
+              </a:rPr>
+              <a:t>A</a:t>
+            </a:r>
+            <a:endParaRPr lang="en-US" sz="1300" dirty="0"/>
+          </a:p>
+        </p:txBody>
+      </p:sp>
+      <p:sp>
+        <p:nvSpPr>
+          <p:cNvPr id="14" name="Text 12"/>
+          <p:cNvSpPr txBox="1"/>
+          <p:nvPr/>
+        </p:nvSpPr>
+        <p:spPr>
+          <a:xfrm>
+            <a:off x="6720840" y="2148840"/>
+            <a:ext cx="4754880" cy="731520"/>
+          </a:xfrm>
+          <a:prstGeom prst="rect">
+            <a:avLst/>
+          </a:prstGeom>
+          <a:noFill/>
+          <a:ln/>
+        </p:spPr>
+        <p:txBody>
+          <a:bodyPr wrap="square" lIns="0" tIns="0" rIns="0" bIns="0" rtlCol="0" anchor="ctr"/>
+          <a:lstStyle/>
+          <a:p>
+            <a:pPr indent="0" marL="0">
+              <a:lnSpc>
+                <a:spcPct val="115000"/>
+              </a:lnSpc>
+              <a:buNone/>
+            </a:pPr>
+            <a:r>
+              <a:rPr lang="en-US" sz="1700" dirty="0">
                 <a:solidFill>
                   <a:srgbClr val="101828"/>
                 </a:solidFill>
@@ -3104,48 +3393,409 @@
                 <a:ea typeface="IBM Plex Sans" pitchFamily="34" charset="-122"/>
                 <a:cs typeface="IBM Plex Sans" pitchFamily="34" charset="-120"/>
               </a:rPr>
-              <a:t>Eight loops are waiting on the floor below you. Tap the star and sort each one by how many times its block runs.</a:t>
-            </a:r>
-            <a:endParaRPr lang="en-US" sz="2200" dirty="0"/>
-          </a:p>
-        </p:txBody>
-      </p:sp>
-      <p:sp>
-        <p:nvSpPr>
-          <p:cNvPr id="10" name="Text 8"/>
-          <p:cNvSpPr txBox="1"/>
-          <p:nvPr/>
-        </p:nvSpPr>
-        <p:spPr>
-          <a:xfrm>
-            <a:off x="502920" y="4526280"/>
-            <a:ext cx="11155680" cy="457200"/>
-          </a:xfrm>
-          <a:prstGeom prst="rect">
-            <a:avLst/>
-          </a:prstGeom>
-          <a:noFill/>
-          <a:ln/>
-        </p:spPr>
-        <p:txBody>
-          <a:bodyPr wrap="square" lIns="0" tIns="0" rIns="0" bIns="0" rtlCol="0" anchor="ctr"/>
-          <a:lstStyle/>
-          <a:p>
-            <a:pPr indent="0" marL="0">
-              <a:buNone/>
-            </a:pPr>
-            <a:r>
-              <a:rPr lang="en-US" sz="1600" dirty="0">
-                <a:solidFill>
-                  <a:srgbClr val="667085"/>
+              <a:t>1</a:t>
+            </a:r>
+            <a:endParaRPr lang="en-US" sz="1700" dirty="0"/>
+          </a:p>
+          <a:p>
+            <a:pPr indent="0" marL="0">
+              <a:lnSpc>
+                <a:spcPct val="115000"/>
+              </a:lnSpc>
+              <a:buNone/>
+            </a:pPr>
+            <a:r>
+              <a:rPr lang="en-US" sz="1700" dirty="0">
+                <a:solidFill>
+                  <a:srgbClr val="101828"/>
                 </a:solidFill>
                 <a:latin typeface="IBM Plex Sans" pitchFamily="34" charset="0"/>
                 <a:ea typeface="IBM Plex Sans" pitchFamily="34" charset="-122"/>
                 <a:cs typeface="IBM Plex Sans" pitchFamily="34" charset="-120"/>
               </a:rPr>
-              <a:t>Predict on paper first, then look down and test it.</a:t>
-            </a:r>
-            <a:endParaRPr lang="en-US" sz="1600" dirty="0"/>
+              <a:t>2</a:t>
+            </a:r>
+            <a:endParaRPr lang="en-US" sz="1700" dirty="0"/>
+          </a:p>
+          <a:p>
+            <a:pPr indent="0" marL="0">
+              <a:lnSpc>
+                <a:spcPct val="115000"/>
+              </a:lnSpc>
+              <a:buNone/>
+            </a:pPr>
+            <a:r>
+              <a:rPr lang="en-US" sz="1700" dirty="0">
+                <a:solidFill>
+                  <a:srgbClr val="101828"/>
+                </a:solidFill>
+                <a:latin typeface="IBM Plex Sans" pitchFamily="34" charset="0"/>
+                <a:ea typeface="IBM Plex Sans" pitchFamily="34" charset="-122"/>
+                <a:cs typeface="IBM Plex Sans" pitchFamily="34" charset="-120"/>
+              </a:rPr>
+              <a:t>3</a:t>
+            </a:r>
+            <a:endParaRPr lang="en-US" sz="1700" dirty="0"/>
+          </a:p>
+        </p:txBody>
+      </p:sp>
+      <p:sp>
+        <p:nvSpPr>
+          <p:cNvPr id="15" name="Shape 13"/>
+          <p:cNvSpPr/>
+          <p:nvPr/>
+        </p:nvSpPr>
+        <p:spPr>
+          <a:xfrm>
+            <a:off x="5806440" y="3017520"/>
+            <a:ext cx="5852160" cy="731520"/>
+          </a:xfrm>
+          <a:prstGeom prst="roundRect">
+            <a:avLst>
+              <a:gd name="adj" fmla="val 15000"/>
+            </a:avLst>
+          </a:prstGeom>
+          <a:solidFill>
+            <a:srgbClr val="FFFFFF"/>
+          </a:solidFill>
+          <a:ln w="15875">
+            <a:solidFill>
+              <a:srgbClr val="D9DEE7"/>
+            </a:solidFill>
+            <a:prstDash val="solid"/>
+          </a:ln>
+        </p:spPr>
+      </p:sp>
+      <p:sp>
+        <p:nvSpPr>
+          <p:cNvPr id="16" name="Shape 14"/>
+          <p:cNvSpPr/>
+          <p:nvPr/>
+        </p:nvSpPr>
+        <p:spPr>
+          <a:xfrm>
+            <a:off x="6080760" y="3163824"/>
+            <a:ext cx="438912" cy="438912"/>
+          </a:xfrm>
+          <a:prstGeom prst="roundRect">
+            <a:avLst>
+              <a:gd name="adj" fmla="val 20833"/>
+            </a:avLst>
+          </a:prstGeom>
+          <a:solidFill>
+            <a:srgbClr val="EEF2FB"/>
+          </a:solidFill>
+          <a:ln/>
+        </p:spPr>
+      </p:sp>
+      <p:sp>
+        <p:nvSpPr>
+          <p:cNvPr id="17" name="Text 15"/>
+          <p:cNvSpPr txBox="1"/>
+          <p:nvPr/>
+        </p:nvSpPr>
+        <p:spPr>
+          <a:xfrm>
+            <a:off x="6080760" y="3163824"/>
+            <a:ext cx="438912" cy="438912"/>
+          </a:xfrm>
+          <a:prstGeom prst="rect">
+            <a:avLst/>
+          </a:prstGeom>
+          <a:noFill/>
+          <a:ln/>
+        </p:spPr>
+        <p:txBody>
+          <a:bodyPr wrap="square" lIns="0" tIns="0" rIns="0" bIns="0" rtlCol="0" anchor="ctr"/>
+          <a:lstStyle/>
+          <a:p>
+            <a:pPr algn="ctr" indent="0" marL="0">
+              <a:buNone/>
+            </a:pPr>
+            <a:r>
+              <a:rPr lang="en-US" sz="1300" b="1" dirty="0">
+                <a:solidFill>
+                  <a:srgbClr val="2D63FF"/>
+                </a:solidFill>
+                <a:latin typeface="IBM Plex Mono" pitchFamily="34" charset="0"/>
+                <a:ea typeface="IBM Plex Mono" pitchFamily="34" charset="-122"/>
+                <a:cs typeface="IBM Plex Mono" pitchFamily="34" charset="-120"/>
+              </a:rPr>
+              <a:t>B</a:t>
+            </a:r>
+            <a:endParaRPr lang="en-US" sz="1300" dirty="0"/>
+          </a:p>
+        </p:txBody>
+      </p:sp>
+      <p:sp>
+        <p:nvSpPr>
+          <p:cNvPr id="18" name="Text 16"/>
+          <p:cNvSpPr txBox="1"/>
+          <p:nvPr/>
+        </p:nvSpPr>
+        <p:spPr>
+          <a:xfrm>
+            <a:off x="6720840" y="3017520"/>
+            <a:ext cx="4754880" cy="731520"/>
+          </a:xfrm>
+          <a:prstGeom prst="rect">
+            <a:avLst/>
+          </a:prstGeom>
+          <a:noFill/>
+          <a:ln/>
+        </p:spPr>
+        <p:txBody>
+          <a:bodyPr wrap="square" lIns="0" tIns="0" rIns="0" bIns="0" rtlCol="0" anchor="ctr"/>
+          <a:lstStyle/>
+          <a:p>
+            <a:pPr indent="0" marL="0">
+              <a:lnSpc>
+                <a:spcPct val="115000"/>
+              </a:lnSpc>
+              <a:buNone/>
+            </a:pPr>
+            <a:r>
+              <a:rPr lang="en-US" sz="1700" dirty="0">
+                <a:solidFill>
+                  <a:srgbClr val="101828"/>
+                </a:solidFill>
+                <a:latin typeface="IBM Plex Sans" pitchFamily="34" charset="0"/>
+                <a:ea typeface="IBM Plex Sans" pitchFamily="34" charset="-122"/>
+                <a:cs typeface="IBM Plex Sans" pitchFamily="34" charset="-120"/>
+              </a:rPr>
+              <a:t>1</a:t>
+            </a:r>
+            <a:endParaRPr lang="en-US" sz="1700" dirty="0"/>
+          </a:p>
+          <a:p>
+            <a:pPr indent="0" marL="0">
+              <a:lnSpc>
+                <a:spcPct val="115000"/>
+              </a:lnSpc>
+              <a:buNone/>
+            </a:pPr>
+            <a:r>
+              <a:rPr lang="en-US" sz="1700" dirty="0">
+                <a:solidFill>
+                  <a:srgbClr val="101828"/>
+                </a:solidFill>
+                <a:latin typeface="IBM Plex Sans" pitchFamily="34" charset="0"/>
+                <a:ea typeface="IBM Plex Sans" pitchFamily="34" charset="-122"/>
+                <a:cs typeface="IBM Plex Sans" pitchFamily="34" charset="-120"/>
+              </a:rPr>
+              <a:t>4</a:t>
+            </a:r>
+            <a:endParaRPr lang="en-US" sz="1700" dirty="0"/>
+          </a:p>
+          <a:p>
+            <a:pPr indent="0" marL="0">
+              <a:lnSpc>
+                <a:spcPct val="115000"/>
+              </a:lnSpc>
+              <a:buNone/>
+            </a:pPr>
+            <a:r>
+              <a:rPr lang="en-US" sz="1700" dirty="0">
+                <a:solidFill>
+                  <a:srgbClr val="101828"/>
+                </a:solidFill>
+                <a:latin typeface="IBM Plex Sans" pitchFamily="34" charset="0"/>
+                <a:ea typeface="IBM Plex Sans" pitchFamily="34" charset="-122"/>
+                <a:cs typeface="IBM Plex Sans" pitchFamily="34" charset="-120"/>
+              </a:rPr>
+              <a:t>7</a:t>
+            </a:r>
+            <a:endParaRPr lang="en-US" sz="1700" dirty="0"/>
+          </a:p>
+        </p:txBody>
+      </p:sp>
+      <p:sp>
+        <p:nvSpPr>
+          <p:cNvPr id="19" name="Shape 17"/>
+          <p:cNvSpPr/>
+          <p:nvPr/>
+        </p:nvSpPr>
+        <p:spPr>
+          <a:xfrm>
+            <a:off x="5806440" y="3886200"/>
+            <a:ext cx="5852160" cy="731520"/>
+          </a:xfrm>
+          <a:prstGeom prst="roundRect">
+            <a:avLst>
+              <a:gd name="adj" fmla="val 15000"/>
+            </a:avLst>
+          </a:prstGeom>
+          <a:solidFill>
+            <a:srgbClr val="FFFFFF"/>
+          </a:solidFill>
+          <a:ln w="15875">
+            <a:solidFill>
+              <a:srgbClr val="D9DEE7"/>
+            </a:solidFill>
+            <a:prstDash val="solid"/>
+          </a:ln>
+        </p:spPr>
+      </p:sp>
+      <p:sp>
+        <p:nvSpPr>
+          <p:cNvPr id="20" name="Shape 18"/>
+          <p:cNvSpPr/>
+          <p:nvPr/>
+        </p:nvSpPr>
+        <p:spPr>
+          <a:xfrm>
+            <a:off x="6080760" y="4032504"/>
+            <a:ext cx="438912" cy="438912"/>
+          </a:xfrm>
+          <a:prstGeom prst="roundRect">
+            <a:avLst>
+              <a:gd name="adj" fmla="val 20833"/>
+            </a:avLst>
+          </a:prstGeom>
+          <a:solidFill>
+            <a:srgbClr val="EEF2FB"/>
+          </a:solidFill>
+          <a:ln/>
+        </p:spPr>
+      </p:sp>
+      <p:sp>
+        <p:nvSpPr>
+          <p:cNvPr id="21" name="Text 19"/>
+          <p:cNvSpPr txBox="1"/>
+          <p:nvPr/>
+        </p:nvSpPr>
+        <p:spPr>
+          <a:xfrm>
+            <a:off x="6080760" y="4032504"/>
+            <a:ext cx="438912" cy="438912"/>
+          </a:xfrm>
+          <a:prstGeom prst="rect">
+            <a:avLst/>
+          </a:prstGeom>
+          <a:noFill/>
+          <a:ln/>
+        </p:spPr>
+        <p:txBody>
+          <a:bodyPr wrap="square" lIns="0" tIns="0" rIns="0" bIns="0" rtlCol="0" anchor="ctr"/>
+          <a:lstStyle/>
+          <a:p>
+            <a:pPr algn="ctr" indent="0" marL="0">
+              <a:buNone/>
+            </a:pPr>
+            <a:r>
+              <a:rPr lang="en-US" sz="1300" b="1" dirty="0">
+                <a:solidFill>
+                  <a:srgbClr val="2D63FF"/>
+                </a:solidFill>
+                <a:latin typeface="IBM Plex Mono" pitchFamily="34" charset="0"/>
+                <a:ea typeface="IBM Plex Mono" pitchFamily="34" charset="-122"/>
+                <a:cs typeface="IBM Plex Mono" pitchFamily="34" charset="-120"/>
+              </a:rPr>
+              <a:t>C</a:t>
+            </a:r>
+            <a:endParaRPr lang="en-US" sz="1300" dirty="0"/>
+          </a:p>
+        </p:txBody>
+      </p:sp>
+      <p:sp>
+        <p:nvSpPr>
+          <p:cNvPr id="22" name="Text 20"/>
+          <p:cNvSpPr txBox="1"/>
+          <p:nvPr/>
+        </p:nvSpPr>
+        <p:spPr>
+          <a:xfrm>
+            <a:off x="6720840" y="3886200"/>
+            <a:ext cx="4754880" cy="731520"/>
+          </a:xfrm>
+          <a:prstGeom prst="rect">
+            <a:avLst/>
+          </a:prstGeom>
+          <a:noFill/>
+          <a:ln/>
+        </p:spPr>
+        <p:txBody>
+          <a:bodyPr wrap="square" lIns="0" tIns="0" rIns="0" bIns="0" rtlCol="0" anchor="ctr"/>
+          <a:lstStyle/>
+          <a:p>
+            <a:pPr indent="0" marL="0">
+              <a:lnSpc>
+                <a:spcPct val="115000"/>
+              </a:lnSpc>
+              <a:buNone/>
+            </a:pPr>
+            <a:r>
+              <a:rPr lang="en-US" sz="1700" dirty="0">
+                <a:solidFill>
+                  <a:srgbClr val="101828"/>
+                </a:solidFill>
+                <a:latin typeface="IBM Plex Sans" pitchFamily="34" charset="0"/>
+                <a:ea typeface="IBM Plex Sans" pitchFamily="34" charset="-122"/>
+                <a:cs typeface="IBM Plex Sans" pitchFamily="34" charset="-120"/>
+              </a:rPr>
+              <a:t>1</a:t>
+            </a:r>
+            <a:endParaRPr lang="en-US" sz="1700" dirty="0"/>
+          </a:p>
+          <a:p>
+            <a:pPr indent="0" marL="0">
+              <a:lnSpc>
+                <a:spcPct val="115000"/>
+              </a:lnSpc>
+              <a:buNone/>
+            </a:pPr>
+            <a:r>
+              <a:rPr lang="en-US" sz="1700" dirty="0">
+                <a:solidFill>
+                  <a:srgbClr val="101828"/>
+                </a:solidFill>
+                <a:latin typeface="IBM Plex Sans" pitchFamily="34" charset="0"/>
+                <a:ea typeface="IBM Plex Sans" pitchFamily="34" charset="-122"/>
+                <a:cs typeface="IBM Plex Sans" pitchFamily="34" charset="-120"/>
+              </a:rPr>
+              <a:t>4</a:t>
+            </a:r>
+            <a:endParaRPr lang="en-US" sz="1700" dirty="0"/>
+          </a:p>
+          <a:p>
+            <a:pPr indent="0" marL="0">
+              <a:lnSpc>
+                <a:spcPct val="115000"/>
+              </a:lnSpc>
+              <a:buNone/>
+            </a:pPr>
+            <a:r>
+              <a:rPr lang="en-US" sz="1700" dirty="0">
+                <a:solidFill>
+                  <a:srgbClr val="101828"/>
+                </a:solidFill>
+                <a:latin typeface="IBM Plex Sans" pitchFamily="34" charset="0"/>
+                <a:ea typeface="IBM Plex Sans" pitchFamily="34" charset="-122"/>
+                <a:cs typeface="IBM Plex Sans" pitchFamily="34" charset="-120"/>
+              </a:rPr>
+              <a:t>7</a:t>
+            </a:r>
+            <a:endParaRPr lang="en-US" sz="1700" dirty="0"/>
+          </a:p>
+          <a:p>
+            <a:pPr indent="0" marL="0">
+              <a:lnSpc>
+                <a:spcPct val="115000"/>
+              </a:lnSpc>
+              <a:buNone/>
+            </a:pPr>
+            <a:r>
+              <a:rPr lang="en-US" sz="1700" dirty="0">
+                <a:solidFill>
+                  <a:srgbClr val="101828"/>
+                </a:solidFill>
+                <a:latin typeface="IBM Plex Sans" pitchFamily="34" charset="0"/>
+                <a:ea typeface="IBM Plex Sans" pitchFamily="34" charset="-122"/>
+                <a:cs typeface="IBM Plex Sans" pitchFamily="34" charset="-120"/>
+              </a:rPr>
+              <a:t>10</a:t>
+            </a:r>
+            <a:endParaRPr lang="en-US" sz="1700" dirty="0"/>
           </a:p>
         </p:txBody>
       </p:sp>
@@ -3281,30 +3931,91 @@
       </p:sp>
       <p:sp>
         <p:nvSpPr>
-          <p:cNvPr id="5" name="Text 3"/>
-          <p:cNvSpPr txBox="1"/>
-          <p:nvPr/>
-        </p:nvSpPr>
-        <p:spPr>
-          <a:xfrm>
-            <a:off x="502920" y="411480"/>
-            <a:ext cx="11155680" cy="777240"/>
-          </a:xfrm>
-          <a:prstGeom prst="rect">
-            <a:avLst/>
-          </a:prstGeom>
-          <a:noFill/>
-          <a:ln/>
-        </p:spPr>
-        <p:txBody>
-          <a:bodyPr wrap="square" lIns="0" tIns="0" rIns="0" bIns="0" rtlCol="0" anchor="ctr"/>
-          <a:lstStyle/>
-          <a:p>
-            <a:pPr indent="0" marL="0">
-              <a:buNone/>
-            </a:pPr>
-            <a:r>
-              <a:rPr lang="en-US" sz="3200" b="1" dirty="0">
+          <p:cNvPr id="5" name="Shape 3"/>
+          <p:cNvSpPr/>
+          <p:nvPr/>
+        </p:nvSpPr>
+        <p:spPr>
+          <a:xfrm>
+            <a:off x="502920" y="438912"/>
+            <a:ext cx="3108960" cy="502920"/>
+          </a:xfrm>
+          <a:prstGeom prst="roundRect">
+            <a:avLst>
+              <a:gd name="adj" fmla="val 18182"/>
+            </a:avLst>
+          </a:prstGeom>
+          <a:solidFill>
+            <a:srgbClr val="F4B942"/>
+          </a:solidFill>
+          <a:ln/>
+        </p:spPr>
+      </p:sp>
+      <p:sp>
+        <p:nvSpPr>
+          <p:cNvPr id="6" name="Text 4"/>
+          <p:cNvSpPr txBox="1"/>
+          <p:nvPr/>
+        </p:nvSpPr>
+        <p:spPr>
+          <a:xfrm>
+            <a:off x="502920" y="438912"/>
+            <a:ext cx="3108960" cy="502920"/>
+          </a:xfrm>
+          <a:prstGeom prst="rect">
+            <a:avLst/>
+          </a:prstGeom>
+          <a:noFill/>
+          <a:ln/>
+        </p:spPr>
+        <p:txBody>
+          <a:bodyPr wrap="square" lIns="0" tIns="0" rIns="0" bIns="0" rtlCol="0" anchor="ctr"/>
+          <a:lstStyle/>
+          <a:p>
+            <a:pPr algn="ctr" indent="0" marL="0">
+              <a:buNone/>
+            </a:pPr>
+            <a:r>
+              <a:rPr lang="en-US" sz="1300" b="1" dirty="0">
+                <a:solidFill>
+                  <a:srgbClr val="101828"/>
+                </a:solidFill>
+                <a:latin typeface="IBM Plex Mono" pitchFamily="34" charset="0"/>
+                <a:ea typeface="IBM Plex Mono" pitchFamily="34" charset="-122"/>
+                <a:cs typeface="IBM Plex Mono" pitchFamily="34" charset="-120"/>
+              </a:rPr>
+              <a:t>★  FINAL CHALLENGE</a:t>
+            </a:r>
+            <a:endParaRPr lang="en-US" sz="1300" dirty="0"/>
+          </a:p>
+        </p:txBody>
+      </p:sp>
+      <p:sp>
+        <p:nvSpPr>
+          <p:cNvPr id="7" name="Text 5"/>
+          <p:cNvSpPr txBox="1"/>
+          <p:nvPr/>
+        </p:nvSpPr>
+        <p:spPr>
+          <a:xfrm>
+            <a:off x="502920" y="1097280"/>
+            <a:ext cx="11155680" cy="731520"/>
+          </a:xfrm>
+          <a:prstGeom prst="rect">
+            <a:avLst/>
+          </a:prstGeom>
+          <a:noFill/>
+          <a:ln/>
+        </p:spPr>
+        <p:txBody>
+          <a:bodyPr wrap="square" lIns="0" tIns="0" rIns="0" bIns="0" rtlCol="0" anchor="ctr"/>
+          <a:lstStyle/>
+          <a:p>
+            <a:pPr indent="0" marL="0">
+              <a:buNone/>
+            </a:pPr>
+            <a:r>
+              <a:rPr lang="en-US" sz="3400" b="1" dirty="0">
                 <a:solidFill>
                   <a:srgbClr val="101828"/>
                 </a:solidFill>
@@ -3312,65 +4023,26 @@
                 <a:ea typeface="IBM Plex Sans" pitchFamily="34" charset="-122"/>
                 <a:cs typeface="IBM Plex Sans" pitchFamily="34" charset="-120"/>
               </a:rPr>
-              <a:t>Worth knowing</a:t>
-            </a:r>
-            <a:endParaRPr lang="en-US" sz="3200" dirty="0"/>
-          </a:p>
-        </p:txBody>
-      </p:sp>
-      <p:sp>
-        <p:nvSpPr>
-          <p:cNvPr id="6" name="Text 4"/>
-          <p:cNvSpPr txBox="1"/>
-          <p:nvPr/>
-        </p:nvSpPr>
-        <p:spPr>
-          <a:xfrm>
-            <a:off x="502920" y="1170432"/>
-            <a:ext cx="11155680" cy="411480"/>
-          </a:xfrm>
-          <a:prstGeom prst="rect">
-            <a:avLst/>
-          </a:prstGeom>
-          <a:noFill/>
-          <a:ln/>
-        </p:spPr>
-        <p:txBody>
-          <a:bodyPr wrap="square" lIns="0" tIns="0" rIns="0" bIns="0" rtlCol="0" anchor="ctr"/>
-          <a:lstStyle/>
-          <a:p>
-            <a:pPr indent="0" marL="0">
-              <a:buNone/>
-            </a:pPr>
-            <a:r>
-              <a:rPr lang="en-US" sz="1500" dirty="0">
-                <a:solidFill>
-                  <a:srgbClr val="667085"/>
-                </a:solidFill>
-                <a:latin typeface="IBM Plex Sans" pitchFamily="34" charset="0"/>
-                <a:ea typeface="IBM Plex Sans" pitchFamily="34" charset="-122"/>
-                <a:cs typeface="IBM Plex Sans" pitchFamily="34" charset="-120"/>
-              </a:rPr>
-              <a:t>The information markers dotted around the room</a:t>
-            </a:r>
-            <a:endParaRPr lang="en-US" sz="1500" dirty="0"/>
-          </a:p>
-        </p:txBody>
-      </p:sp>
-      <p:sp>
-        <p:nvSpPr>
-          <p:cNvPr id="7" name="Shape 5"/>
+              <a:t>How many times?</a:t>
+            </a:r>
+            <a:endParaRPr lang="en-US" sz="3400" dirty="0"/>
+          </a:p>
+        </p:txBody>
+      </p:sp>
+      <p:sp>
+        <p:nvSpPr>
+          <p:cNvPr id="8" name="Shape 6"/>
           <p:cNvSpPr/>
           <p:nvPr/>
         </p:nvSpPr>
         <p:spPr>
           <a:xfrm>
-            <a:off x="502920" y="1828800"/>
-            <a:ext cx="5394960" cy="1737360"/>
+            <a:off x="502920" y="2011680"/>
+            <a:ext cx="11155680" cy="2194560"/>
           </a:xfrm>
           <a:prstGeom prst="roundRect">
             <a:avLst>
-              <a:gd name="adj" fmla="val 6316"/>
+              <a:gd name="adj" fmla="val 5000"/>
             </a:avLst>
           </a:prstGeom>
           <a:solidFill>
@@ -3386,72 +4058,72 @@
       </p:sp>
       <p:sp>
         <p:nvSpPr>
-          <p:cNvPr id="8" name="Text 6"/>
-          <p:cNvSpPr txBox="1"/>
-          <p:nvPr/>
-        </p:nvSpPr>
-        <p:spPr>
-          <a:xfrm>
-            <a:off x="822960" y="2011680"/>
-            <a:ext cx="4754880" cy="365760"/>
-          </a:xfrm>
-          <a:prstGeom prst="rect">
-            <a:avLst/>
-          </a:prstGeom>
-          <a:noFill/>
-          <a:ln/>
-        </p:spPr>
-        <p:txBody>
-          <a:bodyPr wrap="square" lIns="0" tIns="0" rIns="0" bIns="0" rtlCol="0" anchor="ctr"/>
-          <a:lstStyle/>
-          <a:p>
-            <a:pPr indent="0" marL="0">
-              <a:buNone/>
-            </a:pPr>
-            <a:r>
-              <a:rPr lang="en-US" sz="1600" b="1" dirty="0">
-                <a:solidFill>
-                  <a:srgbClr val="2D63FF"/>
+          <p:cNvPr id="9" name="Text 7"/>
+          <p:cNvSpPr txBox="1"/>
+          <p:nvPr/>
+        </p:nvSpPr>
+        <p:spPr>
+          <a:xfrm>
+            <a:off x="1005840" y="2331720"/>
+            <a:ext cx="10149840" cy="1554480"/>
+          </a:xfrm>
+          <a:prstGeom prst="rect">
+            <a:avLst/>
+          </a:prstGeom>
+          <a:noFill/>
+          <a:ln/>
+        </p:spPr>
+        <p:txBody>
+          <a:bodyPr wrap="square" lIns="0" tIns="0" rIns="0" bIns="0" rtlCol="0" anchor="ctr"/>
+          <a:lstStyle/>
+          <a:p>
+            <a:pPr indent="0" marL="0">
+              <a:lnSpc>
+                <a:spcPct val="130000"/>
+              </a:lnSpc>
+              <a:buNone/>
+            </a:pPr>
+            <a:r>
+              <a:rPr lang="en-US" sz="2200" dirty="0">
+                <a:solidFill>
+                  <a:srgbClr val="101828"/>
                 </a:solidFill>
                 <a:latin typeface="IBM Plex Sans" pitchFamily="34" charset="0"/>
                 <a:ea typeface="IBM Plex Sans" pitchFamily="34" charset="-122"/>
                 <a:cs typeface="IBM Plex Sans" pitchFamily="34" charset="-120"/>
               </a:rPr>
-              <a:t>Three structures</a:t>
-            </a:r>
-            <a:endParaRPr lang="en-US" sz="1600" dirty="0"/>
-          </a:p>
-        </p:txBody>
-      </p:sp>
-      <p:sp>
-        <p:nvSpPr>
-          <p:cNvPr id="9" name="Text 7"/>
-          <p:cNvSpPr txBox="1"/>
-          <p:nvPr/>
-        </p:nvSpPr>
-        <p:spPr>
-          <a:xfrm>
-            <a:off x="822960" y="2395728"/>
-            <a:ext cx="4754880" cy="1005840"/>
-          </a:xfrm>
-          <a:prstGeom prst="rect">
-            <a:avLst/>
-          </a:prstGeom>
-          <a:noFill/>
-          <a:ln/>
-        </p:spPr>
-        <p:txBody>
-          <a:bodyPr wrap="square" lIns="0" tIns="0" rIns="0" bIns="0" rtlCol="0" anchor="t"/>
-          <a:lstStyle/>
-          <a:p>
-            <a:pPr indent="0" marL="0">
-              <a:lnSpc>
-                <a:spcPct val="120000"/>
-              </a:lnSpc>
-              <a:buNone/>
-            </a:pPr>
-            <a:r>
-              <a:rPr lang="en-US" sz="1300" dirty="0">
+              <a:t>Eight loops are waiting on the floor below you. Tap the star and sort each one by how many times its block runs.</a:t>
+            </a:r>
+            <a:endParaRPr lang="en-US" sz="2200" dirty="0"/>
+          </a:p>
+        </p:txBody>
+      </p:sp>
+      <p:sp>
+        <p:nvSpPr>
+          <p:cNvPr id="10" name="Text 8"/>
+          <p:cNvSpPr txBox="1"/>
+          <p:nvPr/>
+        </p:nvSpPr>
+        <p:spPr>
+          <a:xfrm>
+            <a:off x="502920" y="4526280"/>
+            <a:ext cx="11155680" cy="457200"/>
+          </a:xfrm>
+          <a:prstGeom prst="rect">
+            <a:avLst/>
+          </a:prstGeom>
+          <a:noFill/>
+          <a:ln/>
+        </p:spPr>
+        <p:txBody>
+          <a:bodyPr wrap="square" lIns="0" tIns="0" rIns="0" bIns="0" rtlCol="0" anchor="ctr"/>
+          <a:lstStyle/>
+          <a:p>
+            <a:pPr indent="0" marL="0">
+              <a:buNone/>
+            </a:pPr>
+            <a:r>
+              <a:rPr lang="en-US" sz="1600" dirty="0">
                 <a:solidFill>
                   <a:srgbClr val="667085"/>
                 </a:solidFill>
@@ -3459,333 +4131,9 @@
                 <a:ea typeface="IBM Plex Sans" pitchFamily="34" charset="-122"/>
                 <a:cs typeface="IBM Plex Sans" pitchFamily="34" charset="-120"/>
               </a:rPr>
-              <a:t>Sequence, selection and iteration are the three building blocks of every program ever written.</a:t>
-            </a:r>
-            <a:endParaRPr lang="en-US" sz="1300" dirty="0"/>
-          </a:p>
-        </p:txBody>
-      </p:sp>
-      <p:sp>
-        <p:nvSpPr>
-          <p:cNvPr id="10" name="Shape 8"/>
-          <p:cNvSpPr/>
-          <p:nvPr/>
-        </p:nvSpPr>
-        <p:spPr>
-          <a:xfrm>
-            <a:off x="6217920" y="1828800"/>
-            <a:ext cx="5394960" cy="1737360"/>
-          </a:xfrm>
-          <a:prstGeom prst="roundRect">
-            <a:avLst>
-              <a:gd name="adj" fmla="val 6316"/>
-            </a:avLst>
-          </a:prstGeom>
-          <a:solidFill>
-            <a:srgbClr val="FFFFFF"/>
-          </a:solidFill>
-          <a:ln w="15875">
-            <a:solidFill>
-              <a:srgbClr val="08A6A6"/>
-            </a:solidFill>
-            <a:prstDash val="solid"/>
-          </a:ln>
-        </p:spPr>
-      </p:sp>
-      <p:sp>
-        <p:nvSpPr>
-          <p:cNvPr id="11" name="Text 9"/>
-          <p:cNvSpPr txBox="1"/>
-          <p:nvPr/>
-        </p:nvSpPr>
-        <p:spPr>
-          <a:xfrm>
-            <a:off x="6537960" y="2011680"/>
-            <a:ext cx="4754880" cy="365760"/>
-          </a:xfrm>
-          <a:prstGeom prst="rect">
-            <a:avLst/>
-          </a:prstGeom>
-          <a:noFill/>
-          <a:ln/>
-        </p:spPr>
-        <p:txBody>
-          <a:bodyPr wrap="square" lIns="0" tIns="0" rIns="0" bIns="0" rtlCol="0" anchor="ctr"/>
-          <a:lstStyle/>
-          <a:p>
-            <a:pPr indent="0" marL="0">
-              <a:buNone/>
-            </a:pPr>
-            <a:r>
-              <a:rPr lang="en-US" sz="1600" b="1" dirty="0">
-                <a:solidFill>
-                  <a:srgbClr val="08A6A6"/>
-                </a:solidFill>
-                <a:latin typeface="IBM Plex Sans" pitchFamily="34" charset="0"/>
-                <a:ea typeface="IBM Plex Sans" pitchFamily="34" charset="-122"/>
-                <a:cs typeface="IBM Plex Sans" pitchFamily="34" charset="-120"/>
-              </a:rPr>
-              <a:t>Why i</a:t>
+              <a:t>Predict on paper first, then look down and test it.</a:t>
             </a:r>
             <a:endParaRPr lang="en-US" sz="1600" dirty="0"/>
-          </a:p>
-        </p:txBody>
-      </p:sp>
-      <p:sp>
-        <p:nvSpPr>
-          <p:cNvPr id="12" name="Text 10"/>
-          <p:cNvSpPr txBox="1"/>
-          <p:nvPr/>
-        </p:nvSpPr>
-        <p:spPr>
-          <a:xfrm>
-            <a:off x="6537960" y="2395728"/>
-            <a:ext cx="4754880" cy="1005840"/>
-          </a:xfrm>
-          <a:prstGeom prst="rect">
-            <a:avLst/>
-          </a:prstGeom>
-          <a:noFill/>
-          <a:ln/>
-        </p:spPr>
-        <p:txBody>
-          <a:bodyPr wrap="square" lIns="0" tIns="0" rIns="0" bIns="0" rtlCol="0" anchor="t"/>
-          <a:lstStyle/>
-          <a:p>
-            <a:pPr indent="0" marL="0">
-              <a:lnSpc>
-                <a:spcPct val="120000"/>
-              </a:lnSpc>
-              <a:buNone/>
-            </a:pPr>
-            <a:r>
-              <a:rPr lang="en-US" sz="1300" dirty="0">
-                <a:solidFill>
-                  <a:srgbClr val="667085"/>
-                </a:solidFill>
-                <a:latin typeface="IBM Plex Sans" pitchFamily="34" charset="0"/>
-                <a:ea typeface="IBM Plex Sans" pitchFamily="34" charset="-122"/>
-                <a:cs typeface="IBM Plex Sans" pitchFamily="34" charset="-120"/>
-              </a:rPr>
-              <a:t>The loop variable is traditionally i, for index, with j and k for nested loops - but a name that says what it counts is clearer.</a:t>
-            </a:r>
-            <a:endParaRPr lang="en-US" sz="1300" dirty="0"/>
-          </a:p>
-        </p:txBody>
-      </p:sp>
-      <p:sp>
-        <p:nvSpPr>
-          <p:cNvPr id="13" name="Shape 11"/>
-          <p:cNvSpPr/>
-          <p:nvPr/>
-        </p:nvSpPr>
-        <p:spPr>
-          <a:xfrm>
-            <a:off x="502920" y="3794760"/>
-            <a:ext cx="5394960" cy="1737360"/>
-          </a:xfrm>
-          <a:prstGeom prst="roundRect">
-            <a:avLst>
-              <a:gd name="adj" fmla="val 6316"/>
-            </a:avLst>
-          </a:prstGeom>
-          <a:solidFill>
-            <a:srgbClr val="FFFFFF"/>
-          </a:solidFill>
-          <a:ln w="15875">
-            <a:solidFill>
-              <a:srgbClr val="2D63FF"/>
-            </a:solidFill>
-            <a:prstDash val="solid"/>
-          </a:ln>
-        </p:spPr>
-      </p:sp>
-      <p:sp>
-        <p:nvSpPr>
-          <p:cNvPr id="14" name="Text 12"/>
-          <p:cNvSpPr txBox="1"/>
-          <p:nvPr/>
-        </p:nvSpPr>
-        <p:spPr>
-          <a:xfrm>
-            <a:off x="822960" y="3977640"/>
-            <a:ext cx="4754880" cy="365760"/>
-          </a:xfrm>
-          <a:prstGeom prst="rect">
-            <a:avLst/>
-          </a:prstGeom>
-          <a:noFill/>
-          <a:ln/>
-        </p:spPr>
-        <p:txBody>
-          <a:bodyPr wrap="square" lIns="0" tIns="0" rIns="0" bIns="0" rtlCol="0" anchor="ctr"/>
-          <a:lstStyle/>
-          <a:p>
-            <a:pPr indent="0" marL="0">
-              <a:buNone/>
-            </a:pPr>
-            <a:r>
-              <a:rPr lang="en-US" sz="1600" b="1" dirty="0">
-                <a:solidFill>
-                  <a:srgbClr val="2D63FF"/>
-                </a:solidFill>
-                <a:latin typeface="IBM Plex Sans" pitchFamily="34" charset="0"/>
-                <a:ea typeface="IBM Plex Sans" pitchFamily="34" charset="-122"/>
-                <a:cs typeface="IBM Plex Sans" pitchFamily="34" charset="-120"/>
-              </a:rPr>
-              <a:t>Counting down</a:t>
-            </a:r>
-            <a:endParaRPr lang="en-US" sz="1600" dirty="0"/>
-          </a:p>
-        </p:txBody>
-      </p:sp>
-      <p:sp>
-        <p:nvSpPr>
-          <p:cNvPr id="15" name="Text 13"/>
-          <p:cNvSpPr txBox="1"/>
-          <p:nvPr/>
-        </p:nvSpPr>
-        <p:spPr>
-          <a:xfrm>
-            <a:off x="822960" y="4361688"/>
-            <a:ext cx="4754880" cy="1005840"/>
-          </a:xfrm>
-          <a:prstGeom prst="rect">
-            <a:avLst/>
-          </a:prstGeom>
-          <a:noFill/>
-          <a:ln/>
-        </p:spPr>
-        <p:txBody>
-          <a:bodyPr wrap="square" lIns="0" tIns="0" rIns="0" bIns="0" rtlCol="0" anchor="t"/>
-          <a:lstStyle/>
-          <a:p>
-            <a:pPr indent="0" marL="0">
-              <a:lnSpc>
-                <a:spcPct val="120000"/>
-              </a:lnSpc>
-              <a:buNone/>
-            </a:pPr>
-            <a:r>
-              <a:rPr lang="en-US" sz="1300" dirty="0">
-                <a:solidFill>
-                  <a:srgbClr val="667085"/>
-                </a:solidFill>
-                <a:latin typeface="IBM Plex Sans" pitchFamily="34" charset="0"/>
-                <a:ea typeface="IBM Plex Sans" pitchFamily="34" charset="-122"/>
-                <a:cs typeface="IBM Plex Sans" pitchFamily="34" charset="-120"/>
-              </a:rPr>
-              <a:t>A negative step counts backwards, which is how a program works through a list from the end to the start.</a:t>
-            </a:r>
-            <a:endParaRPr lang="en-US" sz="1300" dirty="0"/>
-          </a:p>
-        </p:txBody>
-      </p:sp>
-      <p:sp>
-        <p:nvSpPr>
-          <p:cNvPr id="16" name="Shape 14"/>
-          <p:cNvSpPr/>
-          <p:nvPr/>
-        </p:nvSpPr>
-        <p:spPr>
-          <a:xfrm>
-            <a:off x="6217920" y="3794760"/>
-            <a:ext cx="5394960" cy="1737360"/>
-          </a:xfrm>
-          <a:prstGeom prst="roundRect">
-            <a:avLst>
-              <a:gd name="adj" fmla="val 6316"/>
-            </a:avLst>
-          </a:prstGeom>
-          <a:solidFill>
-            <a:srgbClr val="FFFFFF"/>
-          </a:solidFill>
-          <a:ln w="15875">
-            <a:solidFill>
-              <a:srgbClr val="08A6A6"/>
-            </a:solidFill>
-            <a:prstDash val="solid"/>
-          </a:ln>
-        </p:spPr>
-      </p:sp>
-      <p:sp>
-        <p:nvSpPr>
-          <p:cNvPr id="17" name="Text 15"/>
-          <p:cNvSpPr txBox="1"/>
-          <p:nvPr/>
-        </p:nvSpPr>
-        <p:spPr>
-          <a:xfrm>
-            <a:off x="6537960" y="3977640"/>
-            <a:ext cx="4754880" cy="365760"/>
-          </a:xfrm>
-          <a:prstGeom prst="rect">
-            <a:avLst/>
-          </a:prstGeom>
-          <a:noFill/>
-          <a:ln/>
-        </p:spPr>
-        <p:txBody>
-          <a:bodyPr wrap="square" lIns="0" tIns="0" rIns="0" bIns="0" rtlCol="0" anchor="ctr"/>
-          <a:lstStyle/>
-          <a:p>
-            <a:pPr indent="0" marL="0">
-              <a:buNone/>
-            </a:pPr>
-            <a:r>
-              <a:rPr lang="en-US" sz="1600" b="1" dirty="0">
-                <a:solidFill>
-                  <a:srgbClr val="08A6A6"/>
-                </a:solidFill>
-                <a:latin typeface="IBM Plex Sans" pitchFamily="34" charset="0"/>
-                <a:ea typeface="IBM Plex Sans" pitchFamily="34" charset="-122"/>
-                <a:cs typeface="IBM Plex Sans" pitchFamily="34" charset="-120"/>
-              </a:rPr>
-              <a:t>One pass, many answers</a:t>
-            </a:r>
-            <a:endParaRPr lang="en-US" sz="1600" dirty="0"/>
-          </a:p>
-        </p:txBody>
-      </p:sp>
-      <p:sp>
-        <p:nvSpPr>
-          <p:cNvPr id="18" name="Text 16"/>
-          <p:cNvSpPr txBox="1"/>
-          <p:nvPr/>
-        </p:nvSpPr>
-        <p:spPr>
-          <a:xfrm>
-            <a:off x="6537960" y="4361688"/>
-            <a:ext cx="4754880" cy="1005840"/>
-          </a:xfrm>
-          <a:prstGeom prst="rect">
-            <a:avLst/>
-          </a:prstGeom>
-          <a:noFill/>
-          <a:ln/>
-        </p:spPr>
-        <p:txBody>
-          <a:bodyPr wrap="square" lIns="0" tIns="0" rIns="0" bIns="0" rtlCol="0" anchor="t"/>
-          <a:lstStyle/>
-          <a:p>
-            <a:pPr indent="0" marL="0">
-              <a:lnSpc>
-                <a:spcPct val="120000"/>
-              </a:lnSpc>
-              <a:buNone/>
-            </a:pPr>
-            <a:r>
-              <a:rPr lang="en-US" sz="1300" dirty="0">
-                <a:solidFill>
-                  <a:srgbClr val="667085"/>
-                </a:solidFill>
-                <a:latin typeface="IBM Plex Sans" pitchFamily="34" charset="0"/>
-                <a:ea typeface="IBM Plex Sans" pitchFamily="34" charset="-122"/>
-                <a:cs typeface="IBM Plex Sans" pitchFamily="34" charset="-120"/>
-              </a:rPr>
-              <a:t>A single loop can build a total, a count and a highest value all at once, which saves going through the data twice.</a:t>
-            </a:r>
-            <a:endParaRPr lang="en-US" sz="1300" dirty="0"/>
           </a:p>
         </p:txBody>
       </p:sp>
@@ -3952,7 +4300,7 @@
                 <a:ea typeface="IBM Plex Sans" pitchFamily="34" charset="-122"/>
                 <a:cs typeface="IBM Plex Sans" pitchFamily="34" charset="-120"/>
               </a:rPr>
-              <a:t>Exam practice</a:t>
+              <a:t>Worth knowing</a:t>
             </a:r>
             <a:endParaRPr lang="en-US" sz="3200" dirty="0"/>
           </a:p>
@@ -3991,7 +4339,7 @@
                 <a:ea typeface="IBM Plex Sans" pitchFamily="34" charset="-122"/>
                 <a:cs typeface="IBM Plex Sans" pitchFamily="34" charset="-120"/>
               </a:rPr>
-              <a:t>Devices away. Answer from memory on the worksheet.</a:t>
+              <a:t>The information markers dotted around the room</a:t>
             </a:r>
             <a:endParaRPr lang="en-US" sz="1500" dirty="0"/>
           </a:p>
@@ -4006,11 +4354,11 @@
         <p:spPr>
           <a:xfrm>
             <a:off x="502920" y="1828800"/>
-            <a:ext cx="11155680" cy="1097280"/>
+            <a:ext cx="5394960" cy="1737360"/>
           </a:xfrm>
           <a:prstGeom prst="roundRect">
             <a:avLst>
-              <a:gd name="adj" fmla="val 10000"/>
+              <a:gd name="adj" fmla="val 6316"/>
             </a:avLst>
           </a:prstGeom>
           <a:solidFill>
@@ -4018,7 +4366,7 @@
           </a:solidFill>
           <a:ln w="15875">
             <a:solidFill>
-              <a:srgbClr val="D9DEE7"/>
+              <a:srgbClr val="2D63FF"/>
             </a:solidFill>
             <a:prstDash val="solid"/>
           </a:ln>
@@ -4032,370 +4380,93 @@
         </p:nvSpPr>
         <p:spPr>
           <a:xfrm>
-            <a:off x="914400" y="1938528"/>
-            <a:ext cx="9418320" cy="877824"/>
-          </a:xfrm>
-          <a:prstGeom prst="rect">
-            <a:avLst/>
-          </a:prstGeom>
-          <a:noFill/>
-          <a:ln/>
-        </p:spPr>
-        <p:txBody>
-          <a:bodyPr wrap="square" lIns="0" tIns="0" rIns="0" bIns="0" rtlCol="0" anchor="ctr"/>
-          <a:lstStyle/>
-          <a:p>
-            <a:pPr indent="0" marL="0">
-              <a:lnSpc>
-                <a:spcPct val="118000"/>
-              </a:lnSpc>
-              <a:buNone/>
-            </a:pPr>
-            <a:r>
-              <a:rPr lang="en-US" sz="1700" dirty="0">
-                <a:solidFill>
-                  <a:srgbClr val="101828"/>
+            <a:off x="822960" y="2011680"/>
+            <a:ext cx="4754880" cy="365760"/>
+          </a:xfrm>
+          <a:prstGeom prst="rect">
+            <a:avLst/>
+          </a:prstGeom>
+          <a:noFill/>
+          <a:ln/>
+        </p:spPr>
+        <p:txBody>
+          <a:bodyPr wrap="square" lIns="0" tIns="0" rIns="0" bIns="0" rtlCol="0" anchor="ctr"/>
+          <a:lstStyle/>
+          <a:p>
+            <a:pPr indent="0" marL="0">
+              <a:buNone/>
+            </a:pPr>
+            <a:r>
+              <a:rPr lang="en-US" sz="1600" b="1" dirty="0">
+                <a:solidFill>
+                  <a:srgbClr val="2D63FF"/>
                 </a:solidFill>
                 <a:latin typeface="IBM Plex Sans" pitchFamily="34" charset="0"/>
                 <a:ea typeface="IBM Plex Sans" pitchFamily="34" charset="-122"/>
                 <a:cs typeface="IBM Plex Sans" pitchFamily="34" charset="-120"/>
               </a:rPr>
-              <a:t>A program should print the numbers 1 to 10 but prints 0 to 9 instead. Its loop begins </a:t>
-            </a:r>
+              <a:t>Three structures</a:t>
+            </a:r>
+            <a:endParaRPr lang="en-US" sz="1600" dirty="0"/>
+          </a:p>
+        </p:txBody>
+      </p:sp>
+      <p:sp>
+        <p:nvSpPr>
+          <p:cNvPr id="9" name="Text 7"/>
+          <p:cNvSpPr txBox="1"/>
+          <p:nvPr/>
+        </p:nvSpPr>
+        <p:spPr>
+          <a:xfrm>
+            <a:off x="822960" y="2395728"/>
+            <a:ext cx="4754880" cy="1005840"/>
+          </a:xfrm>
+          <a:prstGeom prst="rect">
+            <a:avLst/>
+          </a:prstGeom>
+          <a:noFill/>
+          <a:ln/>
+        </p:spPr>
+        <p:txBody>
+          <a:bodyPr wrap="square" lIns="0" tIns="0" rIns="0" bIns="0" rtlCol="0" anchor="t"/>
+          <a:lstStyle/>
+          <a:p>
             <a:pPr indent="0" marL="0">
               <a:lnSpc>
-                <a:spcPct val="118000"/>
+                <a:spcPct val="120000"/>
               </a:lnSpc>
               <a:buNone/>
             </a:pPr>
             <a:r>
-              <a:rPr lang="en-US" sz="1700" dirty="0">
-                <a:solidFill>
-                  <a:srgbClr val="6B21A8"/>
-                </a:solidFill>
-                <a:latin typeface="IBM Plex Mono" pitchFamily="34" charset="0"/>
-                <a:ea typeface="IBM Plex Mono" pitchFamily="34" charset="-122"/>
-                <a:cs typeface="IBM Plex Mono" pitchFamily="34" charset="-120"/>
-              </a:rPr>
-              <a:t>for</a:t>
-            </a:r>
-            <a:pPr indent="0" marL="0">
-              <a:lnSpc>
-                <a:spcPct val="118000"/>
-              </a:lnSpc>
-              <a:buNone/>
-            </a:pPr>
-            <a:r>
-              <a:rPr lang="en-US" sz="1700" dirty="0">
-                <a:solidFill>
-                  <a:srgbClr val="18181B"/>
-                </a:solidFill>
-                <a:latin typeface="IBM Plex Mono" pitchFamily="34" charset="0"/>
-                <a:ea typeface="IBM Plex Mono" pitchFamily="34" charset="-122"/>
-                <a:cs typeface="IBM Plex Mono" pitchFamily="34" charset="-120"/>
-              </a:rPr>
-              <a:t> </a:t>
-            </a:r>
-            <a:pPr indent="0" marL="0">
-              <a:lnSpc>
-                <a:spcPct val="118000"/>
-              </a:lnSpc>
-              <a:buNone/>
-            </a:pPr>
-            <a:r>
-              <a:rPr lang="en-US" sz="1700" dirty="0">
-                <a:solidFill>
-                  <a:srgbClr val="18181B"/>
-                </a:solidFill>
-                <a:latin typeface="IBM Plex Mono" pitchFamily="34" charset="0"/>
-                <a:ea typeface="IBM Plex Mono" pitchFamily="34" charset="-122"/>
-                <a:cs typeface="IBM Plex Mono" pitchFamily="34" charset="-120"/>
-              </a:rPr>
-              <a:t>i</a:t>
-            </a:r>
-            <a:pPr indent="0" marL="0">
-              <a:lnSpc>
-                <a:spcPct val="118000"/>
-              </a:lnSpc>
-              <a:buNone/>
-            </a:pPr>
-            <a:r>
-              <a:rPr lang="en-US" sz="1700" dirty="0">
-                <a:solidFill>
-                  <a:srgbClr val="18181B"/>
-                </a:solidFill>
-                <a:latin typeface="IBM Plex Mono" pitchFamily="34" charset="0"/>
-                <a:ea typeface="IBM Plex Mono" pitchFamily="34" charset="-122"/>
-                <a:cs typeface="IBM Plex Mono" pitchFamily="34" charset="-120"/>
-              </a:rPr>
-              <a:t> </a:t>
-            </a:r>
-            <a:pPr indent="0" marL="0">
-              <a:lnSpc>
-                <a:spcPct val="118000"/>
-              </a:lnSpc>
-              <a:buNone/>
-            </a:pPr>
-            <a:r>
-              <a:rPr lang="en-US" sz="1700" dirty="0">
-                <a:solidFill>
-                  <a:srgbClr val="6B21A8"/>
-                </a:solidFill>
-                <a:latin typeface="IBM Plex Mono" pitchFamily="34" charset="0"/>
-                <a:ea typeface="IBM Plex Mono" pitchFamily="34" charset="-122"/>
-                <a:cs typeface="IBM Plex Mono" pitchFamily="34" charset="-120"/>
-              </a:rPr>
-              <a:t>in</a:t>
-            </a:r>
-            <a:pPr indent="0" marL="0">
-              <a:lnSpc>
-                <a:spcPct val="118000"/>
-              </a:lnSpc>
-              <a:buNone/>
-            </a:pPr>
-            <a:r>
-              <a:rPr lang="en-US" sz="1700" dirty="0">
-                <a:solidFill>
-                  <a:srgbClr val="18181B"/>
-                </a:solidFill>
-                <a:latin typeface="IBM Plex Mono" pitchFamily="34" charset="0"/>
-                <a:ea typeface="IBM Plex Mono" pitchFamily="34" charset="-122"/>
-                <a:cs typeface="IBM Plex Mono" pitchFamily="34" charset="-120"/>
-              </a:rPr>
-              <a:t> </a:t>
-            </a:r>
-            <a:pPr indent="0" marL="0">
-              <a:lnSpc>
-                <a:spcPct val="118000"/>
-              </a:lnSpc>
-              <a:buNone/>
-            </a:pPr>
-            <a:r>
-              <a:rPr lang="en-US" sz="1700" dirty="0">
-                <a:solidFill>
-                  <a:srgbClr val="1D4ED8"/>
-                </a:solidFill>
-                <a:latin typeface="IBM Plex Mono" pitchFamily="34" charset="0"/>
-                <a:ea typeface="IBM Plex Mono" pitchFamily="34" charset="-122"/>
-                <a:cs typeface="IBM Plex Mono" pitchFamily="34" charset="-120"/>
-              </a:rPr>
-              <a:t>range</a:t>
-            </a:r>
-            <a:pPr indent="0" marL="0">
-              <a:lnSpc>
-                <a:spcPct val="118000"/>
-              </a:lnSpc>
-              <a:buNone/>
-            </a:pPr>
-            <a:r>
-              <a:rPr lang="en-US" sz="1700" dirty="0">
-                <a:solidFill>
-                  <a:srgbClr val="3F3F46"/>
-                </a:solidFill>
-                <a:latin typeface="IBM Plex Mono" pitchFamily="34" charset="0"/>
-                <a:ea typeface="IBM Plex Mono" pitchFamily="34" charset="-122"/>
-                <a:cs typeface="IBM Plex Mono" pitchFamily="34" charset="-120"/>
-              </a:rPr>
-              <a:t>(</a:t>
-            </a:r>
-            <a:pPr indent="0" marL="0">
-              <a:lnSpc>
-                <a:spcPct val="118000"/>
-              </a:lnSpc>
-              <a:buNone/>
-            </a:pPr>
-            <a:r>
-              <a:rPr lang="en-US" sz="1700" dirty="0">
-                <a:solidFill>
-                  <a:srgbClr val="9A3412"/>
-                </a:solidFill>
-                <a:latin typeface="IBM Plex Mono" pitchFamily="34" charset="0"/>
-                <a:ea typeface="IBM Plex Mono" pitchFamily="34" charset="-122"/>
-                <a:cs typeface="IBM Plex Mono" pitchFamily="34" charset="-120"/>
-              </a:rPr>
-              <a:t>10</a:t>
-            </a:r>
-            <a:pPr indent="0" marL="0">
-              <a:lnSpc>
-                <a:spcPct val="118000"/>
-              </a:lnSpc>
-              <a:buNone/>
-            </a:pPr>
-            <a:r>
-              <a:rPr lang="en-US" sz="1700" dirty="0">
-                <a:solidFill>
-                  <a:srgbClr val="3F3F46"/>
-                </a:solidFill>
-                <a:latin typeface="IBM Plex Mono" pitchFamily="34" charset="0"/>
-                <a:ea typeface="IBM Plex Mono" pitchFamily="34" charset="-122"/>
-                <a:cs typeface="IBM Plex Mono" pitchFamily="34" charset="-120"/>
-              </a:rPr>
-              <a:t>)</a:t>
-            </a:r>
-            <a:pPr indent="0" marL="0">
-              <a:lnSpc>
-                <a:spcPct val="118000"/>
-              </a:lnSpc>
-              <a:buNone/>
-            </a:pPr>
-            <a:r>
-              <a:rPr lang="en-US" sz="1700" dirty="0">
-                <a:solidFill>
-                  <a:srgbClr val="101828"/>
+              <a:rPr lang="en-US" sz="1300" dirty="0">
+                <a:solidFill>
+                  <a:srgbClr val="667085"/>
                 </a:solidFill>
                 <a:latin typeface="IBM Plex Sans" pitchFamily="34" charset="0"/>
                 <a:ea typeface="IBM Plex Sans" pitchFamily="34" charset="-122"/>
                 <a:cs typeface="IBM Plex Sans" pitchFamily="34" charset="-120"/>
               </a:rPr>
-              <a:t>. State which values the original </a:t>
-            </a:r>
-            <a:pPr indent="0" marL="0">
-              <a:lnSpc>
-                <a:spcPct val="118000"/>
-              </a:lnSpc>
-              <a:buNone/>
-            </a:pPr>
-            <a:r>
-              <a:rPr lang="en-US" sz="1700" dirty="0">
-                <a:solidFill>
-                  <a:srgbClr val="1D4ED8"/>
-                </a:solidFill>
-                <a:latin typeface="IBM Plex Mono" pitchFamily="34" charset="0"/>
-                <a:ea typeface="IBM Plex Mono" pitchFamily="34" charset="-122"/>
-                <a:cs typeface="IBM Plex Mono" pitchFamily="34" charset="-120"/>
-              </a:rPr>
-              <a:t>range</a:t>
-            </a:r>
-            <a:pPr indent="0" marL="0">
-              <a:lnSpc>
-                <a:spcPct val="118000"/>
-              </a:lnSpc>
-              <a:buNone/>
-            </a:pPr>
-            <a:r>
-              <a:rPr lang="en-US" sz="1700" dirty="0">
-                <a:solidFill>
-                  <a:srgbClr val="3F3F46"/>
-                </a:solidFill>
-                <a:latin typeface="IBM Plex Mono" pitchFamily="34" charset="0"/>
-                <a:ea typeface="IBM Plex Mono" pitchFamily="34" charset="-122"/>
-                <a:cs typeface="IBM Plex Mono" pitchFamily="34" charset="-120"/>
-              </a:rPr>
-              <a:t>(</a:t>
-            </a:r>
-            <a:pPr indent="0" marL="0">
-              <a:lnSpc>
-                <a:spcPct val="118000"/>
-              </a:lnSpc>
-              <a:buNone/>
-            </a:pPr>
-            <a:r>
-              <a:rPr lang="en-US" sz="1700" dirty="0">
-                <a:solidFill>
-                  <a:srgbClr val="3F3F46"/>
-                </a:solidFill>
-                <a:latin typeface="IBM Plex Mono" pitchFamily="34" charset="0"/>
-                <a:ea typeface="IBM Plex Mono" pitchFamily="34" charset="-122"/>
-                <a:cs typeface="IBM Plex Mono" pitchFamily="34" charset="-120"/>
-              </a:rPr>
-              <a:t>)</a:t>
-            </a:r>
-            <a:pPr indent="0" marL="0">
-              <a:lnSpc>
-                <a:spcPct val="118000"/>
-              </a:lnSpc>
-              <a:buNone/>
-            </a:pPr>
-            <a:r>
-              <a:rPr lang="en-US" sz="1700" dirty="0">
-                <a:solidFill>
-                  <a:srgbClr val="101828"/>
-                </a:solidFill>
-                <a:latin typeface="IBM Plex Sans" pitchFamily="34" charset="0"/>
-                <a:ea typeface="IBM Plex Sans" pitchFamily="34" charset="-122"/>
-                <a:cs typeface="IBM Plex Sans" pitchFamily="34" charset="-120"/>
-              </a:rPr>
-              <a:t> counted through, and rewrite the line so the loop prints 1 to 10.</a:t>
-            </a:r>
-            <a:endParaRPr lang="en-US" sz="1700" dirty="0"/>
-          </a:p>
-        </p:txBody>
-      </p:sp>
-      <p:sp>
-        <p:nvSpPr>
-          <p:cNvPr id="9" name="Shape 7"/>
+              <a:t>Sequence, selection and iteration are the three building blocks of every program ever written.</a:t>
+            </a:r>
+            <a:endParaRPr lang="en-US" sz="1300" dirty="0"/>
+          </a:p>
+        </p:txBody>
+      </p:sp>
+      <p:sp>
+        <p:nvSpPr>
+          <p:cNvPr id="10" name="Shape 8"/>
           <p:cNvSpPr/>
           <p:nvPr/>
         </p:nvSpPr>
         <p:spPr>
           <a:xfrm>
-            <a:off x="10515600" y="2130552"/>
-            <a:ext cx="868680" cy="493776"/>
+            <a:off x="6217920" y="1828800"/>
+            <a:ext cx="5394960" cy="1737360"/>
           </a:xfrm>
           <a:prstGeom prst="roundRect">
             <a:avLst>
-              <a:gd name="adj" fmla="val 18519"/>
-            </a:avLst>
-          </a:prstGeom>
-          <a:solidFill>
-            <a:srgbClr val="EEF2FB"/>
-          </a:solidFill>
-          <a:ln/>
-        </p:spPr>
-      </p:sp>
-      <p:sp>
-        <p:nvSpPr>
-          <p:cNvPr id="10" name="Text 8"/>
-          <p:cNvSpPr txBox="1"/>
-          <p:nvPr/>
-        </p:nvSpPr>
-        <p:spPr>
-          <a:xfrm>
-            <a:off x="10515600" y="2130552"/>
-            <a:ext cx="868680" cy="493776"/>
-          </a:xfrm>
-          <a:prstGeom prst="rect">
-            <a:avLst/>
-          </a:prstGeom>
-          <a:noFill/>
-          <a:ln/>
-        </p:spPr>
-        <p:txBody>
-          <a:bodyPr wrap="square" lIns="0" tIns="0" rIns="0" bIns="0" rtlCol="0" anchor="ctr"/>
-          <a:lstStyle/>
-          <a:p>
-            <a:pPr algn="ctr" indent="0" marL="0">
-              <a:buNone/>
-            </a:pPr>
-            <a:r>
-              <a:rPr lang="en-US" sz="1500" b="1" dirty="0">
-                <a:solidFill>
-                  <a:srgbClr val="2D63FF"/>
-                </a:solidFill>
-                <a:latin typeface="IBM Plex Mono" pitchFamily="34" charset="0"/>
-                <a:ea typeface="IBM Plex Mono" pitchFamily="34" charset="-122"/>
-                <a:cs typeface="IBM Plex Mono" pitchFamily="34" charset="-120"/>
-              </a:rPr>
-              <a:t>[2]</a:t>
-            </a:r>
-            <a:endParaRPr lang="en-US" sz="1500" dirty="0"/>
-          </a:p>
-        </p:txBody>
-      </p:sp>
-      <p:sp>
-        <p:nvSpPr>
-          <p:cNvPr id="11" name="Shape 9"/>
-          <p:cNvSpPr/>
-          <p:nvPr/>
-        </p:nvSpPr>
-        <p:spPr>
-          <a:xfrm>
-            <a:off x="502920" y="3127248"/>
-            <a:ext cx="11155680" cy="1097280"/>
-          </a:xfrm>
-          <a:prstGeom prst="roundRect">
-            <a:avLst>
-              <a:gd name="adj" fmla="val 10000"/>
+              <a:gd name="adj" fmla="val 6316"/>
             </a:avLst>
           </a:prstGeom>
           <a:solidFill>
@@ -4403,7 +4474,7 @@
           </a:solidFill>
           <a:ln w="15875">
             <a:solidFill>
-              <a:srgbClr val="D9DEE7"/>
+              <a:srgbClr val="08A6A6"/>
             </a:solidFill>
             <a:prstDash val="solid"/>
           </a:ln>
@@ -4411,43 +4482,82 @@
       </p:sp>
       <p:sp>
         <p:nvSpPr>
-          <p:cNvPr id="12" name="Text 10"/>
-          <p:cNvSpPr txBox="1"/>
-          <p:nvPr/>
-        </p:nvSpPr>
-        <p:spPr>
-          <a:xfrm>
-            <a:off x="914400" y="3236976"/>
-            <a:ext cx="9418320" cy="877824"/>
-          </a:xfrm>
-          <a:prstGeom prst="rect">
-            <a:avLst/>
-          </a:prstGeom>
-          <a:noFill/>
-          <a:ln/>
-        </p:spPr>
-        <p:txBody>
-          <a:bodyPr wrap="square" lIns="0" tIns="0" rIns="0" bIns="0" rtlCol="0" anchor="ctr"/>
-          <a:lstStyle/>
-          <a:p>
-            <a:pPr indent="0" marL="0">
-              <a:lnSpc>
-                <a:spcPct val="118000"/>
-              </a:lnSpc>
-              <a:buNone/>
-            </a:pPr>
-            <a:r>
-              <a:rPr lang="en-US" sz="1700" dirty="0">
-                <a:solidFill>
-                  <a:srgbClr val="101828"/>
+          <p:cNvPr id="11" name="Text 9"/>
+          <p:cNvSpPr txBox="1"/>
+          <p:nvPr/>
+        </p:nvSpPr>
+        <p:spPr>
+          <a:xfrm>
+            <a:off x="6537960" y="2011680"/>
+            <a:ext cx="4754880" cy="365760"/>
+          </a:xfrm>
+          <a:prstGeom prst="rect">
+            <a:avLst/>
+          </a:prstGeom>
+          <a:noFill/>
+          <a:ln/>
+        </p:spPr>
+        <p:txBody>
+          <a:bodyPr wrap="square" lIns="0" tIns="0" rIns="0" bIns="0" rtlCol="0" anchor="ctr"/>
+          <a:lstStyle/>
+          <a:p>
+            <a:pPr indent="0" marL="0">
+              <a:buNone/>
+            </a:pPr>
+            <a:r>
+              <a:rPr lang="en-US" sz="1600" b="1" dirty="0">
+                <a:solidFill>
+                  <a:srgbClr val="08A6A6"/>
                 </a:solidFill>
                 <a:latin typeface="IBM Plex Sans" pitchFamily="34" charset="0"/>
                 <a:ea typeface="IBM Plex Sans" pitchFamily="34" charset="-122"/>
                 <a:cs typeface="IBM Plex Sans" pitchFamily="34" charset="-120"/>
               </a:rPr>
-              <a:t>Write a program that reads how many numbers there are, then reads that many whole numbers and prints their total and their average.</a:t>
-            </a:r>
-            <a:endParaRPr lang="en-US" sz="1700" dirty="0"/>
+              <a:t>Why i</a:t>
+            </a:r>
+            <a:endParaRPr lang="en-US" sz="1600" dirty="0"/>
+          </a:p>
+        </p:txBody>
+      </p:sp>
+      <p:sp>
+        <p:nvSpPr>
+          <p:cNvPr id="12" name="Text 10"/>
+          <p:cNvSpPr txBox="1"/>
+          <p:nvPr/>
+        </p:nvSpPr>
+        <p:spPr>
+          <a:xfrm>
+            <a:off x="6537960" y="2395728"/>
+            <a:ext cx="4754880" cy="1005840"/>
+          </a:xfrm>
+          <a:prstGeom prst="rect">
+            <a:avLst/>
+          </a:prstGeom>
+          <a:noFill/>
+          <a:ln/>
+        </p:spPr>
+        <p:txBody>
+          <a:bodyPr wrap="square" lIns="0" tIns="0" rIns="0" bIns="0" rtlCol="0" anchor="t"/>
+          <a:lstStyle/>
+          <a:p>
+            <a:pPr indent="0" marL="0">
+              <a:lnSpc>
+                <a:spcPct val="120000"/>
+              </a:lnSpc>
+              <a:buNone/>
+            </a:pPr>
+            <a:r>
+              <a:rPr lang="en-US" sz="1300" dirty="0">
+                <a:solidFill>
+                  <a:srgbClr val="667085"/>
+                </a:solidFill>
+                <a:latin typeface="IBM Plex Sans" pitchFamily="34" charset="0"/>
+                <a:ea typeface="IBM Plex Sans" pitchFamily="34" charset="-122"/>
+                <a:cs typeface="IBM Plex Sans" pitchFamily="34" charset="-120"/>
+              </a:rPr>
+              <a:t>The loop variable is traditionally i, for index, with j and k for nested loops - but a name that says what it counts is clearer.</a:t>
+            </a:r>
+            <a:endParaRPr lang="en-US" sz="1300" dirty="0"/>
           </a:p>
         </p:txBody>
       </p:sp>
@@ -4459,73 +4569,12 @@
         </p:nvSpPr>
         <p:spPr>
           <a:xfrm>
-            <a:off x="10515600" y="3429000"/>
-            <a:ext cx="868680" cy="493776"/>
+            <a:off x="502920" y="3794760"/>
+            <a:ext cx="5394960" cy="1737360"/>
           </a:xfrm>
           <a:prstGeom prst="roundRect">
             <a:avLst>
-              <a:gd name="adj" fmla="val 18519"/>
-            </a:avLst>
-          </a:prstGeom>
-          <a:solidFill>
-            <a:srgbClr val="EEF2FB"/>
-          </a:solidFill>
-          <a:ln/>
-        </p:spPr>
-      </p:sp>
-      <p:sp>
-        <p:nvSpPr>
-          <p:cNvPr id="14" name="Text 12"/>
-          <p:cNvSpPr txBox="1"/>
-          <p:nvPr/>
-        </p:nvSpPr>
-        <p:spPr>
-          <a:xfrm>
-            <a:off x="10515600" y="3429000"/>
-            <a:ext cx="868680" cy="493776"/>
-          </a:xfrm>
-          <a:prstGeom prst="rect">
-            <a:avLst/>
-          </a:prstGeom>
-          <a:noFill/>
-          <a:ln/>
-        </p:spPr>
-        <p:txBody>
-          <a:bodyPr wrap="square" lIns="0" tIns="0" rIns="0" bIns="0" rtlCol="0" anchor="ctr"/>
-          <a:lstStyle/>
-          <a:p>
-            <a:pPr algn="ctr" indent="0" marL="0">
-              <a:buNone/>
-            </a:pPr>
-            <a:r>
-              <a:rPr lang="en-US" sz="1500" b="1" dirty="0">
-                <a:solidFill>
-                  <a:srgbClr val="2D63FF"/>
-                </a:solidFill>
-                <a:latin typeface="IBM Plex Mono" pitchFamily="34" charset="0"/>
-                <a:ea typeface="IBM Plex Mono" pitchFamily="34" charset="-122"/>
-                <a:cs typeface="IBM Plex Mono" pitchFamily="34" charset="-120"/>
-              </a:rPr>
-              <a:t>[5]</a:t>
-            </a:r>
-            <a:endParaRPr lang="en-US" sz="1500" dirty="0"/>
-          </a:p>
-        </p:txBody>
-      </p:sp>
-      <p:sp>
-        <p:nvSpPr>
-          <p:cNvPr id="15" name="Shape 13"/>
-          <p:cNvSpPr/>
-          <p:nvPr/>
-        </p:nvSpPr>
-        <p:spPr>
-          <a:xfrm>
-            <a:off x="502920" y="4425696"/>
-            <a:ext cx="11155680" cy="1097280"/>
-          </a:xfrm>
-          <a:prstGeom prst="roundRect">
-            <a:avLst>
-              <a:gd name="adj" fmla="val 10000"/>
+              <a:gd name="adj" fmla="val 6316"/>
             </a:avLst>
           </a:prstGeom>
           <a:solidFill>
@@ -4533,7 +4582,7 @@
           </a:solidFill>
           <a:ln w="15875">
             <a:solidFill>
-              <a:srgbClr val="D9DEE7"/>
+              <a:srgbClr val="2D63FF"/>
             </a:solidFill>
             <a:prstDash val="solid"/>
           </a:ln>
@@ -4541,67 +4590,150 @@
       </p:sp>
       <p:sp>
         <p:nvSpPr>
-          <p:cNvPr id="16" name="Text 14"/>
-          <p:cNvSpPr txBox="1"/>
-          <p:nvPr/>
-        </p:nvSpPr>
-        <p:spPr>
-          <a:xfrm>
-            <a:off x="914400" y="4535424"/>
-            <a:ext cx="9418320" cy="877824"/>
-          </a:xfrm>
-          <a:prstGeom prst="rect">
-            <a:avLst/>
-          </a:prstGeom>
-          <a:noFill/>
-          <a:ln/>
-        </p:spPr>
-        <p:txBody>
-          <a:bodyPr wrap="square" lIns="0" tIns="0" rIns="0" bIns="0" rtlCol="0" anchor="ctr"/>
-          <a:lstStyle/>
-          <a:p>
-            <a:pPr indent="0" marL="0">
-              <a:lnSpc>
-                <a:spcPct val="118000"/>
-              </a:lnSpc>
-              <a:buNone/>
-            </a:pPr>
-            <a:r>
-              <a:rPr lang="en-US" sz="1700" dirty="0">
-                <a:solidFill>
-                  <a:srgbClr val="101828"/>
+          <p:cNvPr id="14" name="Text 12"/>
+          <p:cNvSpPr txBox="1"/>
+          <p:nvPr/>
+        </p:nvSpPr>
+        <p:spPr>
+          <a:xfrm>
+            <a:off x="822960" y="3977640"/>
+            <a:ext cx="4754880" cy="365760"/>
+          </a:xfrm>
+          <a:prstGeom prst="rect">
+            <a:avLst/>
+          </a:prstGeom>
+          <a:noFill/>
+          <a:ln/>
+        </p:spPr>
+        <p:txBody>
+          <a:bodyPr wrap="square" lIns="0" tIns="0" rIns="0" bIns="0" rtlCol="0" anchor="ctr"/>
+          <a:lstStyle/>
+          <a:p>
+            <a:pPr indent="0" marL="0">
+              <a:buNone/>
+            </a:pPr>
+            <a:r>
+              <a:rPr lang="en-US" sz="1600" b="1" dirty="0">
+                <a:solidFill>
+                  <a:srgbClr val="2D63FF"/>
                 </a:solidFill>
                 <a:latin typeface="IBM Plex Sans" pitchFamily="34" charset="0"/>
                 <a:ea typeface="IBM Plex Sans" pitchFamily="34" charset="-122"/>
                 <a:cs typeface="IBM Plex Sans" pitchFamily="34" charset="-120"/>
               </a:rPr>
-              <a:t>Write a program that reads a whole number and prints that many lines, the first holding one * character, the second two, and so on.</a:t>
-            </a:r>
-            <a:endParaRPr lang="en-US" sz="1700" dirty="0"/>
-          </a:p>
-        </p:txBody>
-      </p:sp>
-      <p:sp>
-        <p:nvSpPr>
-          <p:cNvPr id="17" name="Shape 15"/>
+              <a:t>Counting down</a:t>
+            </a:r>
+            <a:endParaRPr lang="en-US" sz="1600" dirty="0"/>
+          </a:p>
+        </p:txBody>
+      </p:sp>
+      <p:sp>
+        <p:nvSpPr>
+          <p:cNvPr id="15" name="Text 13"/>
+          <p:cNvSpPr txBox="1"/>
+          <p:nvPr/>
+        </p:nvSpPr>
+        <p:spPr>
+          <a:xfrm>
+            <a:off x="822960" y="4361688"/>
+            <a:ext cx="4754880" cy="1005840"/>
+          </a:xfrm>
+          <a:prstGeom prst="rect">
+            <a:avLst/>
+          </a:prstGeom>
+          <a:noFill/>
+          <a:ln/>
+        </p:spPr>
+        <p:txBody>
+          <a:bodyPr wrap="square" lIns="0" tIns="0" rIns="0" bIns="0" rtlCol="0" anchor="t"/>
+          <a:lstStyle/>
+          <a:p>
+            <a:pPr indent="0" marL="0">
+              <a:lnSpc>
+                <a:spcPct val="120000"/>
+              </a:lnSpc>
+              <a:buNone/>
+            </a:pPr>
+            <a:r>
+              <a:rPr lang="en-US" sz="1300" dirty="0">
+                <a:solidFill>
+                  <a:srgbClr val="667085"/>
+                </a:solidFill>
+                <a:latin typeface="IBM Plex Sans" pitchFamily="34" charset="0"/>
+                <a:ea typeface="IBM Plex Sans" pitchFamily="34" charset="-122"/>
+                <a:cs typeface="IBM Plex Sans" pitchFamily="34" charset="-120"/>
+              </a:rPr>
+              <a:t>A negative step counts backwards, which is how a program works through a list from the end to the start.</a:t>
+            </a:r>
+            <a:endParaRPr lang="en-US" sz="1300" dirty="0"/>
+          </a:p>
+        </p:txBody>
+      </p:sp>
+      <p:sp>
+        <p:nvSpPr>
+          <p:cNvPr id="16" name="Shape 14"/>
           <p:cNvSpPr/>
           <p:nvPr/>
         </p:nvSpPr>
         <p:spPr>
           <a:xfrm>
-            <a:off x="10515600" y="4727448"/>
-            <a:ext cx="868680" cy="493776"/>
+            <a:off x="6217920" y="3794760"/>
+            <a:ext cx="5394960" cy="1737360"/>
           </a:xfrm>
           <a:prstGeom prst="roundRect">
             <a:avLst>
-              <a:gd name="adj" fmla="val 18519"/>
+              <a:gd name="adj" fmla="val 6316"/>
             </a:avLst>
           </a:prstGeom>
           <a:solidFill>
-            <a:srgbClr val="EEF2FB"/>
+            <a:srgbClr val="FFFFFF"/>
           </a:solidFill>
-          <a:ln/>
-        </p:spPr>
+          <a:ln w="15875">
+            <a:solidFill>
+              <a:srgbClr val="08A6A6"/>
+            </a:solidFill>
+            <a:prstDash val="solid"/>
+          </a:ln>
+        </p:spPr>
+      </p:sp>
+      <p:sp>
+        <p:nvSpPr>
+          <p:cNvPr id="17" name="Text 15"/>
+          <p:cNvSpPr txBox="1"/>
+          <p:nvPr/>
+        </p:nvSpPr>
+        <p:spPr>
+          <a:xfrm>
+            <a:off x="6537960" y="3977640"/>
+            <a:ext cx="4754880" cy="365760"/>
+          </a:xfrm>
+          <a:prstGeom prst="rect">
+            <a:avLst/>
+          </a:prstGeom>
+          <a:noFill/>
+          <a:ln/>
+        </p:spPr>
+        <p:txBody>
+          <a:bodyPr wrap="square" lIns="0" tIns="0" rIns="0" bIns="0" rtlCol="0" anchor="ctr"/>
+          <a:lstStyle/>
+          <a:p>
+            <a:pPr indent="0" marL="0">
+              <a:buNone/>
+            </a:pPr>
+            <a:r>
+              <a:rPr lang="en-US" sz="1600" b="1" dirty="0">
+                <a:solidFill>
+                  <a:srgbClr val="08A6A6"/>
+                </a:solidFill>
+                <a:latin typeface="IBM Plex Sans" pitchFamily="34" charset="0"/>
+                <a:ea typeface="IBM Plex Sans" pitchFamily="34" charset="-122"/>
+                <a:cs typeface="IBM Plex Sans" pitchFamily="34" charset="-120"/>
+              </a:rPr>
+              <a:t>One pass, many answers</a:t>
+            </a:r>
+            <a:endParaRPr lang="en-US" sz="1600" dirty="0"/>
+          </a:p>
+        </p:txBody>
       </p:sp>
       <p:sp>
         <p:nvSpPr>
@@ -4611,34 +4743,37 @@
         </p:nvSpPr>
         <p:spPr>
           <a:xfrm>
-            <a:off x="10515600" y="4727448"/>
-            <a:ext cx="868680" cy="493776"/>
-          </a:xfrm>
-          <a:prstGeom prst="rect">
-            <a:avLst/>
-          </a:prstGeom>
-          <a:noFill/>
-          <a:ln/>
-        </p:spPr>
-        <p:txBody>
-          <a:bodyPr wrap="square" lIns="0" tIns="0" rIns="0" bIns="0" rtlCol="0" anchor="ctr"/>
-          <a:lstStyle/>
-          <a:p>
-            <a:pPr algn="ctr" indent="0" marL="0">
-              <a:buNone/>
-            </a:pPr>
-            <a:r>
-              <a:rPr lang="en-US" sz="1500" b="1" dirty="0">
-                <a:solidFill>
-                  <a:srgbClr val="2D63FF"/>
-                </a:solidFill>
-                <a:latin typeface="IBM Plex Mono" pitchFamily="34" charset="0"/>
-                <a:ea typeface="IBM Plex Mono" pitchFamily="34" charset="-122"/>
-                <a:cs typeface="IBM Plex Mono" pitchFamily="34" charset="-120"/>
-              </a:rPr>
-              <a:t>[4]</a:t>
-            </a:r>
-            <a:endParaRPr lang="en-US" sz="1500" dirty="0"/>
+            <a:off x="6537960" y="4361688"/>
+            <a:ext cx="4754880" cy="1005840"/>
+          </a:xfrm>
+          <a:prstGeom prst="rect">
+            <a:avLst/>
+          </a:prstGeom>
+          <a:noFill/>
+          <a:ln/>
+        </p:spPr>
+        <p:txBody>
+          <a:bodyPr wrap="square" lIns="0" tIns="0" rIns="0" bIns="0" rtlCol="0" anchor="t"/>
+          <a:lstStyle/>
+          <a:p>
+            <a:pPr indent="0" marL="0">
+              <a:lnSpc>
+                <a:spcPct val="120000"/>
+              </a:lnSpc>
+              <a:buNone/>
+            </a:pPr>
+            <a:r>
+              <a:rPr lang="en-US" sz="1300" dirty="0">
+                <a:solidFill>
+                  <a:srgbClr val="667085"/>
+                </a:solidFill>
+                <a:latin typeface="IBM Plex Sans" pitchFamily="34" charset="0"/>
+                <a:ea typeface="IBM Plex Sans" pitchFamily="34" charset="-122"/>
+                <a:cs typeface="IBM Plex Sans" pitchFamily="34" charset="-120"/>
+              </a:rPr>
+              <a:t>A single loop can build a total, a count and a highest value all at once, which saves going through the data twice.</a:t>
+            </a:r>
+            <a:endParaRPr lang="en-US" sz="1300" dirty="0"/>
           </a:p>
         </p:txBody>
       </p:sp>
@@ -4653,6 +4788,859 @@
 <file path=ppt/slides/slide14.xml><?xml version="1.0" encoding="utf-8"?>
 <p:sld xmlns:a="http://schemas.openxmlformats.org/drawingml/2006/main" xmlns:r="http://schemas.openxmlformats.org/officeDocument/2006/relationships" xmlns:p="http://schemas.openxmlformats.org/presentationml/2006/main">
   <p:cSld name="Slide 14">
+    <p:bg>
+      <p:bgPr>
+        <a:solidFill>
+          <a:srgbClr val="F7F7F4"/>
+        </a:solidFill>
+      </p:bgPr>
+    </p:bg>
+    <p:spTree>
+      <p:nvGrpSpPr>
+        <p:cNvPr id="1" name=""/>
+        <p:cNvGrpSpPr/>
+        <p:nvPr/>
+      </p:nvGrpSpPr>
+      <p:grpSpPr>
+        <a:xfrm>
+          <a:off x="0" y="0"/>
+          <a:ext cx="0" cy="0"/>
+          <a:chOff x="0" y="0"/>
+          <a:chExt cx="0" cy="0"/>
+        </a:xfrm>
+      </p:grpSpPr>
+      <p:sp>
+        <p:nvSpPr>
+          <p:cNvPr id="2" name="Shape 0"/>
+          <p:cNvSpPr/>
+          <p:nvPr/>
+        </p:nvSpPr>
+        <p:spPr>
+          <a:xfrm>
+            <a:off x="0" y="0"/>
+            <a:ext cx="12188952" cy="82296"/>
+          </a:xfrm>
+          <a:prstGeom prst="rect">
+            <a:avLst/>
+          </a:prstGeom>
+          <a:solidFill>
+            <a:srgbClr val="2D63FF"/>
+          </a:solidFill>
+          <a:ln/>
+        </p:spPr>
+      </p:sp>
+      <p:sp>
+        <p:nvSpPr>
+          <p:cNvPr id="3" name="Text 1"/>
+          <p:cNvSpPr txBox="1"/>
+          <p:nvPr/>
+        </p:nvSpPr>
+        <p:spPr>
+          <a:xfrm>
+            <a:off x="502920" y="6236208"/>
+            <a:ext cx="7772400" cy="365760"/>
+          </a:xfrm>
+          <a:prstGeom prst="rect">
+            <a:avLst/>
+          </a:prstGeom>
+          <a:noFill/>
+          <a:ln/>
+        </p:spPr>
+        <p:txBody>
+          <a:bodyPr wrap="square" lIns="0" tIns="0" rIns="0" bIns="0" rtlCol="0" anchor="ctr"/>
+          <a:lstStyle/>
+          <a:p>
+            <a:pPr indent="0" marL="0">
+              <a:buNone/>
+            </a:pPr>
+            <a:r>
+              <a:rPr lang="en-US" sz="1100" dirty="0">
+                <a:solidFill>
+                  <a:srgbClr val="667085"/>
+                </a:solidFill>
+                <a:latin typeface="IBM Plex Mono" pitchFamily="34" charset="0"/>
+                <a:ea typeface="IBM Plex Mono" pitchFamily="34" charset="-122"/>
+                <a:cs typeface="IBM Plex Mono" pitchFamily="34" charset="-120"/>
+              </a:rPr>
+              <a:t>Python programming  |  Lesson 4</a:t>
+            </a:r>
+            <a:endParaRPr lang="en-US" sz="1100" dirty="0"/>
+          </a:p>
+        </p:txBody>
+      </p:sp>
+      <p:sp>
+        <p:nvSpPr>
+          <p:cNvPr id="4" name="Text 2"/>
+          <p:cNvSpPr txBox="1"/>
+          <p:nvPr/>
+        </p:nvSpPr>
+        <p:spPr>
+          <a:xfrm>
+            <a:off x="9326880" y="6236208"/>
+            <a:ext cx="2377440" cy="365760"/>
+          </a:xfrm>
+          <a:prstGeom prst="rect">
+            <a:avLst/>
+          </a:prstGeom>
+          <a:noFill/>
+          <a:ln/>
+        </p:spPr>
+        <p:txBody>
+          <a:bodyPr wrap="square" lIns="0" tIns="0" rIns="0" bIns="0" rtlCol="0" anchor="ctr"/>
+          <a:lstStyle/>
+          <a:p>
+            <a:pPr algn="r" indent="0" marL="0">
+              <a:buNone/>
+            </a:pPr>
+            <a:r>
+              <a:rPr lang="en-US" sz="1100" dirty="0">
+                <a:solidFill>
+                  <a:srgbClr val="667085"/>
+                </a:solidFill>
+                <a:latin typeface="IBM Plex Mono" pitchFamily="34" charset="0"/>
+                <a:ea typeface="IBM Plex Mono" pitchFamily="34" charset="-122"/>
+                <a:cs typeface="IBM Plex Mono" pitchFamily="34" charset="-120"/>
+              </a:rPr>
+              <a:t>Revise 360</a:t>
+            </a:r>
+            <a:endParaRPr lang="en-US" sz="1100" dirty="0"/>
+          </a:p>
+        </p:txBody>
+      </p:sp>
+      <p:sp>
+        <p:nvSpPr>
+          <p:cNvPr id="5" name="Text 3"/>
+          <p:cNvSpPr txBox="1"/>
+          <p:nvPr/>
+        </p:nvSpPr>
+        <p:spPr>
+          <a:xfrm>
+            <a:off x="502920" y="411480"/>
+            <a:ext cx="11155680" cy="777240"/>
+          </a:xfrm>
+          <a:prstGeom prst="rect">
+            <a:avLst/>
+          </a:prstGeom>
+          <a:noFill/>
+          <a:ln/>
+        </p:spPr>
+        <p:txBody>
+          <a:bodyPr wrap="square" lIns="0" tIns="0" rIns="0" bIns="0" rtlCol="0" anchor="ctr"/>
+          <a:lstStyle/>
+          <a:p>
+            <a:pPr indent="0" marL="0">
+              <a:buNone/>
+            </a:pPr>
+            <a:r>
+              <a:rPr lang="en-US" sz="3200" b="1" dirty="0">
+                <a:solidFill>
+                  <a:srgbClr val="101828"/>
+                </a:solidFill>
+                <a:latin typeface="IBM Plex Sans" pitchFamily="34" charset="0"/>
+                <a:ea typeface="IBM Plex Sans" pitchFamily="34" charset="-122"/>
+                <a:cs typeface="IBM Plex Sans" pitchFamily="34" charset="-120"/>
+              </a:rPr>
+              <a:t>Exam practice</a:t>
+            </a:r>
+            <a:endParaRPr lang="en-US" sz="3200" dirty="0"/>
+          </a:p>
+        </p:txBody>
+      </p:sp>
+      <p:sp>
+        <p:nvSpPr>
+          <p:cNvPr id="6" name="Text 4"/>
+          <p:cNvSpPr txBox="1"/>
+          <p:nvPr/>
+        </p:nvSpPr>
+        <p:spPr>
+          <a:xfrm>
+            <a:off x="502920" y="1170432"/>
+            <a:ext cx="11155680" cy="411480"/>
+          </a:xfrm>
+          <a:prstGeom prst="rect">
+            <a:avLst/>
+          </a:prstGeom>
+          <a:noFill/>
+          <a:ln/>
+        </p:spPr>
+        <p:txBody>
+          <a:bodyPr wrap="square" lIns="0" tIns="0" rIns="0" bIns="0" rtlCol="0" anchor="ctr"/>
+          <a:lstStyle/>
+          <a:p>
+            <a:pPr indent="0" marL="0">
+              <a:buNone/>
+            </a:pPr>
+            <a:r>
+              <a:rPr lang="en-US" sz="1500" dirty="0">
+                <a:solidFill>
+                  <a:srgbClr val="667085"/>
+                </a:solidFill>
+                <a:latin typeface="IBM Plex Sans" pitchFamily="34" charset="0"/>
+                <a:ea typeface="IBM Plex Sans" pitchFamily="34" charset="-122"/>
+                <a:cs typeface="IBM Plex Sans" pitchFamily="34" charset="-120"/>
+              </a:rPr>
+              <a:t>Devices away. Answer from memory on the worksheet.</a:t>
+            </a:r>
+            <a:endParaRPr lang="en-US" sz="1500" dirty="0"/>
+          </a:p>
+        </p:txBody>
+      </p:sp>
+      <p:sp>
+        <p:nvSpPr>
+          <p:cNvPr id="7" name="Shape 5"/>
+          <p:cNvSpPr/>
+          <p:nvPr/>
+        </p:nvSpPr>
+        <p:spPr>
+          <a:xfrm>
+            <a:off x="502920" y="1828800"/>
+            <a:ext cx="11155680" cy="1097280"/>
+          </a:xfrm>
+          <a:prstGeom prst="roundRect">
+            <a:avLst>
+              <a:gd name="adj" fmla="val 10000"/>
+            </a:avLst>
+          </a:prstGeom>
+          <a:solidFill>
+            <a:srgbClr val="FFFFFF"/>
+          </a:solidFill>
+          <a:ln w="15875">
+            <a:solidFill>
+              <a:srgbClr val="D9DEE7"/>
+            </a:solidFill>
+            <a:prstDash val="solid"/>
+          </a:ln>
+        </p:spPr>
+      </p:sp>
+      <p:sp>
+        <p:nvSpPr>
+          <p:cNvPr id="8" name="Text 6"/>
+          <p:cNvSpPr txBox="1"/>
+          <p:nvPr/>
+        </p:nvSpPr>
+        <p:spPr>
+          <a:xfrm>
+            <a:off x="914400" y="1938528"/>
+            <a:ext cx="9418320" cy="877824"/>
+          </a:xfrm>
+          <a:prstGeom prst="rect">
+            <a:avLst/>
+          </a:prstGeom>
+          <a:noFill/>
+          <a:ln/>
+        </p:spPr>
+        <p:txBody>
+          <a:bodyPr wrap="square" lIns="0" tIns="0" rIns="0" bIns="0" rtlCol="0" anchor="ctr"/>
+          <a:lstStyle/>
+          <a:p>
+            <a:pPr indent="0" marL="0">
+              <a:lnSpc>
+                <a:spcPct val="118000"/>
+              </a:lnSpc>
+              <a:buNone/>
+            </a:pPr>
+            <a:r>
+              <a:rPr lang="en-US" sz="1700" dirty="0">
+                <a:solidFill>
+                  <a:srgbClr val="101828"/>
+                </a:solidFill>
+                <a:latin typeface="IBM Plex Sans" pitchFamily="34" charset="0"/>
+                <a:ea typeface="IBM Plex Sans" pitchFamily="34" charset="-122"/>
+                <a:cs typeface="IBM Plex Sans" pitchFamily="34" charset="-120"/>
+              </a:rPr>
+              <a:t>A program should print the numbers 1 to 10 but prints 0 to 9 instead. Its loop begins </a:t>
+            </a:r>
+            <a:pPr indent="0" marL="0">
+              <a:lnSpc>
+                <a:spcPct val="118000"/>
+              </a:lnSpc>
+              <a:buNone/>
+            </a:pPr>
+            <a:r>
+              <a:rPr lang="en-US" sz="1700" dirty="0">
+                <a:solidFill>
+                  <a:srgbClr val="6B21A8"/>
+                </a:solidFill>
+                <a:latin typeface="IBM Plex Mono" pitchFamily="34" charset="0"/>
+                <a:ea typeface="IBM Plex Mono" pitchFamily="34" charset="-122"/>
+                <a:cs typeface="IBM Plex Mono" pitchFamily="34" charset="-120"/>
+              </a:rPr>
+              <a:t>for</a:t>
+            </a:r>
+            <a:pPr indent="0" marL="0">
+              <a:lnSpc>
+                <a:spcPct val="118000"/>
+              </a:lnSpc>
+              <a:buNone/>
+            </a:pPr>
+            <a:r>
+              <a:rPr lang="en-US" sz="1700" dirty="0">
+                <a:solidFill>
+                  <a:srgbClr val="18181B"/>
+                </a:solidFill>
+                <a:latin typeface="IBM Plex Mono" pitchFamily="34" charset="0"/>
+                <a:ea typeface="IBM Plex Mono" pitchFamily="34" charset="-122"/>
+                <a:cs typeface="IBM Plex Mono" pitchFamily="34" charset="-120"/>
+              </a:rPr>
+              <a:t> </a:t>
+            </a:r>
+            <a:pPr indent="0" marL="0">
+              <a:lnSpc>
+                <a:spcPct val="118000"/>
+              </a:lnSpc>
+              <a:buNone/>
+            </a:pPr>
+            <a:r>
+              <a:rPr lang="en-US" sz="1700" dirty="0">
+                <a:solidFill>
+                  <a:srgbClr val="18181B"/>
+                </a:solidFill>
+                <a:latin typeface="IBM Plex Mono" pitchFamily="34" charset="0"/>
+                <a:ea typeface="IBM Plex Mono" pitchFamily="34" charset="-122"/>
+                <a:cs typeface="IBM Plex Mono" pitchFamily="34" charset="-120"/>
+              </a:rPr>
+              <a:t>i</a:t>
+            </a:r>
+            <a:pPr indent="0" marL="0">
+              <a:lnSpc>
+                <a:spcPct val="118000"/>
+              </a:lnSpc>
+              <a:buNone/>
+            </a:pPr>
+            <a:r>
+              <a:rPr lang="en-US" sz="1700" dirty="0">
+                <a:solidFill>
+                  <a:srgbClr val="18181B"/>
+                </a:solidFill>
+                <a:latin typeface="IBM Plex Mono" pitchFamily="34" charset="0"/>
+                <a:ea typeface="IBM Plex Mono" pitchFamily="34" charset="-122"/>
+                <a:cs typeface="IBM Plex Mono" pitchFamily="34" charset="-120"/>
+              </a:rPr>
+              <a:t> </a:t>
+            </a:r>
+            <a:pPr indent="0" marL="0">
+              <a:lnSpc>
+                <a:spcPct val="118000"/>
+              </a:lnSpc>
+              <a:buNone/>
+            </a:pPr>
+            <a:r>
+              <a:rPr lang="en-US" sz="1700" dirty="0">
+                <a:solidFill>
+                  <a:srgbClr val="6B21A8"/>
+                </a:solidFill>
+                <a:latin typeface="IBM Plex Mono" pitchFamily="34" charset="0"/>
+                <a:ea typeface="IBM Plex Mono" pitchFamily="34" charset="-122"/>
+                <a:cs typeface="IBM Plex Mono" pitchFamily="34" charset="-120"/>
+              </a:rPr>
+              <a:t>in</a:t>
+            </a:r>
+            <a:pPr indent="0" marL="0">
+              <a:lnSpc>
+                <a:spcPct val="118000"/>
+              </a:lnSpc>
+              <a:buNone/>
+            </a:pPr>
+            <a:r>
+              <a:rPr lang="en-US" sz="1700" dirty="0">
+                <a:solidFill>
+                  <a:srgbClr val="18181B"/>
+                </a:solidFill>
+                <a:latin typeface="IBM Plex Mono" pitchFamily="34" charset="0"/>
+                <a:ea typeface="IBM Plex Mono" pitchFamily="34" charset="-122"/>
+                <a:cs typeface="IBM Plex Mono" pitchFamily="34" charset="-120"/>
+              </a:rPr>
+              <a:t> </a:t>
+            </a:r>
+            <a:pPr indent="0" marL="0">
+              <a:lnSpc>
+                <a:spcPct val="118000"/>
+              </a:lnSpc>
+              <a:buNone/>
+            </a:pPr>
+            <a:r>
+              <a:rPr lang="en-US" sz="1700" dirty="0">
+                <a:solidFill>
+                  <a:srgbClr val="1D4ED8"/>
+                </a:solidFill>
+                <a:latin typeface="IBM Plex Mono" pitchFamily="34" charset="0"/>
+                <a:ea typeface="IBM Plex Mono" pitchFamily="34" charset="-122"/>
+                <a:cs typeface="IBM Plex Mono" pitchFamily="34" charset="-120"/>
+              </a:rPr>
+              <a:t>range</a:t>
+            </a:r>
+            <a:pPr indent="0" marL="0">
+              <a:lnSpc>
+                <a:spcPct val="118000"/>
+              </a:lnSpc>
+              <a:buNone/>
+            </a:pPr>
+            <a:r>
+              <a:rPr lang="en-US" sz="1700" dirty="0">
+                <a:solidFill>
+                  <a:srgbClr val="3F3F46"/>
+                </a:solidFill>
+                <a:latin typeface="IBM Plex Mono" pitchFamily="34" charset="0"/>
+                <a:ea typeface="IBM Plex Mono" pitchFamily="34" charset="-122"/>
+                <a:cs typeface="IBM Plex Mono" pitchFamily="34" charset="-120"/>
+              </a:rPr>
+              <a:t>(</a:t>
+            </a:r>
+            <a:pPr indent="0" marL="0">
+              <a:lnSpc>
+                <a:spcPct val="118000"/>
+              </a:lnSpc>
+              <a:buNone/>
+            </a:pPr>
+            <a:r>
+              <a:rPr lang="en-US" sz="1700" dirty="0">
+                <a:solidFill>
+                  <a:srgbClr val="9A3412"/>
+                </a:solidFill>
+                <a:latin typeface="IBM Plex Mono" pitchFamily="34" charset="0"/>
+                <a:ea typeface="IBM Plex Mono" pitchFamily="34" charset="-122"/>
+                <a:cs typeface="IBM Plex Mono" pitchFamily="34" charset="-120"/>
+              </a:rPr>
+              <a:t>10</a:t>
+            </a:r>
+            <a:pPr indent="0" marL="0">
+              <a:lnSpc>
+                <a:spcPct val="118000"/>
+              </a:lnSpc>
+              <a:buNone/>
+            </a:pPr>
+            <a:r>
+              <a:rPr lang="en-US" sz="1700" dirty="0">
+                <a:solidFill>
+                  <a:srgbClr val="3F3F46"/>
+                </a:solidFill>
+                <a:latin typeface="IBM Plex Mono" pitchFamily="34" charset="0"/>
+                <a:ea typeface="IBM Plex Mono" pitchFamily="34" charset="-122"/>
+                <a:cs typeface="IBM Plex Mono" pitchFamily="34" charset="-120"/>
+              </a:rPr>
+              <a:t>)</a:t>
+            </a:r>
+            <a:pPr indent="0" marL="0">
+              <a:lnSpc>
+                <a:spcPct val="118000"/>
+              </a:lnSpc>
+              <a:buNone/>
+            </a:pPr>
+            <a:r>
+              <a:rPr lang="en-US" sz="1700" dirty="0">
+                <a:solidFill>
+                  <a:srgbClr val="101828"/>
+                </a:solidFill>
+                <a:latin typeface="IBM Plex Sans" pitchFamily="34" charset="0"/>
+                <a:ea typeface="IBM Plex Sans" pitchFamily="34" charset="-122"/>
+                <a:cs typeface="IBM Plex Sans" pitchFamily="34" charset="-120"/>
+              </a:rPr>
+              <a:t>. State which values the original </a:t>
+            </a:r>
+            <a:pPr indent="0" marL="0">
+              <a:lnSpc>
+                <a:spcPct val="118000"/>
+              </a:lnSpc>
+              <a:buNone/>
+            </a:pPr>
+            <a:r>
+              <a:rPr lang="en-US" sz="1700" dirty="0">
+                <a:solidFill>
+                  <a:srgbClr val="1D4ED8"/>
+                </a:solidFill>
+                <a:latin typeface="IBM Plex Mono" pitchFamily="34" charset="0"/>
+                <a:ea typeface="IBM Plex Mono" pitchFamily="34" charset="-122"/>
+                <a:cs typeface="IBM Plex Mono" pitchFamily="34" charset="-120"/>
+              </a:rPr>
+              <a:t>range</a:t>
+            </a:r>
+            <a:pPr indent="0" marL="0">
+              <a:lnSpc>
+                <a:spcPct val="118000"/>
+              </a:lnSpc>
+              <a:buNone/>
+            </a:pPr>
+            <a:r>
+              <a:rPr lang="en-US" sz="1700" dirty="0">
+                <a:solidFill>
+                  <a:srgbClr val="3F3F46"/>
+                </a:solidFill>
+                <a:latin typeface="IBM Plex Mono" pitchFamily="34" charset="0"/>
+                <a:ea typeface="IBM Plex Mono" pitchFamily="34" charset="-122"/>
+                <a:cs typeface="IBM Plex Mono" pitchFamily="34" charset="-120"/>
+              </a:rPr>
+              <a:t>(</a:t>
+            </a:r>
+            <a:pPr indent="0" marL="0">
+              <a:lnSpc>
+                <a:spcPct val="118000"/>
+              </a:lnSpc>
+              <a:buNone/>
+            </a:pPr>
+            <a:r>
+              <a:rPr lang="en-US" sz="1700" dirty="0">
+                <a:solidFill>
+                  <a:srgbClr val="3F3F46"/>
+                </a:solidFill>
+                <a:latin typeface="IBM Plex Mono" pitchFamily="34" charset="0"/>
+                <a:ea typeface="IBM Plex Mono" pitchFamily="34" charset="-122"/>
+                <a:cs typeface="IBM Plex Mono" pitchFamily="34" charset="-120"/>
+              </a:rPr>
+              <a:t>)</a:t>
+            </a:r>
+            <a:pPr indent="0" marL="0">
+              <a:lnSpc>
+                <a:spcPct val="118000"/>
+              </a:lnSpc>
+              <a:buNone/>
+            </a:pPr>
+            <a:r>
+              <a:rPr lang="en-US" sz="1700" dirty="0">
+                <a:solidFill>
+                  <a:srgbClr val="101828"/>
+                </a:solidFill>
+                <a:latin typeface="IBM Plex Sans" pitchFamily="34" charset="0"/>
+                <a:ea typeface="IBM Plex Sans" pitchFamily="34" charset="-122"/>
+                <a:cs typeface="IBM Plex Sans" pitchFamily="34" charset="-120"/>
+              </a:rPr>
+              <a:t> counted through, and rewrite the line so the loop prints 1 to 10.</a:t>
+            </a:r>
+            <a:endParaRPr lang="en-US" sz="1700" dirty="0"/>
+          </a:p>
+        </p:txBody>
+      </p:sp>
+      <p:sp>
+        <p:nvSpPr>
+          <p:cNvPr id="9" name="Shape 7"/>
+          <p:cNvSpPr/>
+          <p:nvPr/>
+        </p:nvSpPr>
+        <p:spPr>
+          <a:xfrm>
+            <a:off x="10515600" y="2130552"/>
+            <a:ext cx="868680" cy="493776"/>
+          </a:xfrm>
+          <a:prstGeom prst="roundRect">
+            <a:avLst>
+              <a:gd name="adj" fmla="val 18519"/>
+            </a:avLst>
+          </a:prstGeom>
+          <a:solidFill>
+            <a:srgbClr val="EEF2FB"/>
+          </a:solidFill>
+          <a:ln/>
+        </p:spPr>
+      </p:sp>
+      <p:sp>
+        <p:nvSpPr>
+          <p:cNvPr id="10" name="Text 8"/>
+          <p:cNvSpPr txBox="1"/>
+          <p:nvPr/>
+        </p:nvSpPr>
+        <p:spPr>
+          <a:xfrm>
+            <a:off x="10515600" y="2130552"/>
+            <a:ext cx="868680" cy="493776"/>
+          </a:xfrm>
+          <a:prstGeom prst="rect">
+            <a:avLst/>
+          </a:prstGeom>
+          <a:noFill/>
+          <a:ln/>
+        </p:spPr>
+        <p:txBody>
+          <a:bodyPr wrap="square" lIns="0" tIns="0" rIns="0" bIns="0" rtlCol="0" anchor="ctr"/>
+          <a:lstStyle/>
+          <a:p>
+            <a:pPr algn="ctr" indent="0" marL="0">
+              <a:buNone/>
+            </a:pPr>
+            <a:r>
+              <a:rPr lang="en-US" sz="1500" b="1" dirty="0">
+                <a:solidFill>
+                  <a:srgbClr val="2D63FF"/>
+                </a:solidFill>
+                <a:latin typeface="IBM Plex Mono" pitchFamily="34" charset="0"/>
+                <a:ea typeface="IBM Plex Mono" pitchFamily="34" charset="-122"/>
+                <a:cs typeface="IBM Plex Mono" pitchFamily="34" charset="-120"/>
+              </a:rPr>
+              <a:t>[2]</a:t>
+            </a:r>
+            <a:endParaRPr lang="en-US" sz="1500" dirty="0"/>
+          </a:p>
+        </p:txBody>
+      </p:sp>
+      <p:sp>
+        <p:nvSpPr>
+          <p:cNvPr id="11" name="Shape 9"/>
+          <p:cNvSpPr/>
+          <p:nvPr/>
+        </p:nvSpPr>
+        <p:spPr>
+          <a:xfrm>
+            <a:off x="502920" y="3127248"/>
+            <a:ext cx="11155680" cy="1097280"/>
+          </a:xfrm>
+          <a:prstGeom prst="roundRect">
+            <a:avLst>
+              <a:gd name="adj" fmla="val 10000"/>
+            </a:avLst>
+          </a:prstGeom>
+          <a:solidFill>
+            <a:srgbClr val="FFFFFF"/>
+          </a:solidFill>
+          <a:ln w="15875">
+            <a:solidFill>
+              <a:srgbClr val="D9DEE7"/>
+            </a:solidFill>
+            <a:prstDash val="solid"/>
+          </a:ln>
+        </p:spPr>
+      </p:sp>
+      <p:sp>
+        <p:nvSpPr>
+          <p:cNvPr id="12" name="Text 10"/>
+          <p:cNvSpPr txBox="1"/>
+          <p:nvPr/>
+        </p:nvSpPr>
+        <p:spPr>
+          <a:xfrm>
+            <a:off x="914400" y="3236976"/>
+            <a:ext cx="9418320" cy="877824"/>
+          </a:xfrm>
+          <a:prstGeom prst="rect">
+            <a:avLst/>
+          </a:prstGeom>
+          <a:noFill/>
+          <a:ln/>
+        </p:spPr>
+        <p:txBody>
+          <a:bodyPr wrap="square" lIns="0" tIns="0" rIns="0" bIns="0" rtlCol="0" anchor="ctr"/>
+          <a:lstStyle/>
+          <a:p>
+            <a:pPr indent="0" marL="0">
+              <a:lnSpc>
+                <a:spcPct val="118000"/>
+              </a:lnSpc>
+              <a:buNone/>
+            </a:pPr>
+            <a:r>
+              <a:rPr lang="en-US" sz="1700" dirty="0">
+                <a:solidFill>
+                  <a:srgbClr val="101828"/>
+                </a:solidFill>
+                <a:latin typeface="IBM Plex Sans" pitchFamily="34" charset="0"/>
+                <a:ea typeface="IBM Plex Sans" pitchFamily="34" charset="-122"/>
+                <a:cs typeface="IBM Plex Sans" pitchFamily="34" charset="-120"/>
+              </a:rPr>
+              <a:t>Write a program that reads how many numbers there are, then reads that many whole numbers and prints their total and their average.</a:t>
+            </a:r>
+            <a:endParaRPr lang="en-US" sz="1700" dirty="0"/>
+          </a:p>
+        </p:txBody>
+      </p:sp>
+      <p:sp>
+        <p:nvSpPr>
+          <p:cNvPr id="13" name="Shape 11"/>
+          <p:cNvSpPr/>
+          <p:nvPr/>
+        </p:nvSpPr>
+        <p:spPr>
+          <a:xfrm>
+            <a:off x="10515600" y="3429000"/>
+            <a:ext cx="868680" cy="493776"/>
+          </a:xfrm>
+          <a:prstGeom prst="roundRect">
+            <a:avLst>
+              <a:gd name="adj" fmla="val 18519"/>
+            </a:avLst>
+          </a:prstGeom>
+          <a:solidFill>
+            <a:srgbClr val="EEF2FB"/>
+          </a:solidFill>
+          <a:ln/>
+        </p:spPr>
+      </p:sp>
+      <p:sp>
+        <p:nvSpPr>
+          <p:cNvPr id="14" name="Text 12"/>
+          <p:cNvSpPr txBox="1"/>
+          <p:nvPr/>
+        </p:nvSpPr>
+        <p:spPr>
+          <a:xfrm>
+            <a:off x="10515600" y="3429000"/>
+            <a:ext cx="868680" cy="493776"/>
+          </a:xfrm>
+          <a:prstGeom prst="rect">
+            <a:avLst/>
+          </a:prstGeom>
+          <a:noFill/>
+          <a:ln/>
+        </p:spPr>
+        <p:txBody>
+          <a:bodyPr wrap="square" lIns="0" tIns="0" rIns="0" bIns="0" rtlCol="0" anchor="ctr"/>
+          <a:lstStyle/>
+          <a:p>
+            <a:pPr algn="ctr" indent="0" marL="0">
+              <a:buNone/>
+            </a:pPr>
+            <a:r>
+              <a:rPr lang="en-US" sz="1500" b="1" dirty="0">
+                <a:solidFill>
+                  <a:srgbClr val="2D63FF"/>
+                </a:solidFill>
+                <a:latin typeface="IBM Plex Mono" pitchFamily="34" charset="0"/>
+                <a:ea typeface="IBM Plex Mono" pitchFamily="34" charset="-122"/>
+                <a:cs typeface="IBM Plex Mono" pitchFamily="34" charset="-120"/>
+              </a:rPr>
+              <a:t>[5]</a:t>
+            </a:r>
+            <a:endParaRPr lang="en-US" sz="1500" dirty="0"/>
+          </a:p>
+        </p:txBody>
+      </p:sp>
+      <p:sp>
+        <p:nvSpPr>
+          <p:cNvPr id="15" name="Shape 13"/>
+          <p:cNvSpPr/>
+          <p:nvPr/>
+        </p:nvSpPr>
+        <p:spPr>
+          <a:xfrm>
+            <a:off x="502920" y="4425696"/>
+            <a:ext cx="11155680" cy="1097280"/>
+          </a:xfrm>
+          <a:prstGeom prst="roundRect">
+            <a:avLst>
+              <a:gd name="adj" fmla="val 10000"/>
+            </a:avLst>
+          </a:prstGeom>
+          <a:solidFill>
+            <a:srgbClr val="FFFFFF"/>
+          </a:solidFill>
+          <a:ln w="15875">
+            <a:solidFill>
+              <a:srgbClr val="D9DEE7"/>
+            </a:solidFill>
+            <a:prstDash val="solid"/>
+          </a:ln>
+        </p:spPr>
+      </p:sp>
+      <p:sp>
+        <p:nvSpPr>
+          <p:cNvPr id="16" name="Text 14"/>
+          <p:cNvSpPr txBox="1"/>
+          <p:nvPr/>
+        </p:nvSpPr>
+        <p:spPr>
+          <a:xfrm>
+            <a:off x="914400" y="4535424"/>
+            <a:ext cx="9418320" cy="877824"/>
+          </a:xfrm>
+          <a:prstGeom prst="rect">
+            <a:avLst/>
+          </a:prstGeom>
+          <a:noFill/>
+          <a:ln/>
+        </p:spPr>
+        <p:txBody>
+          <a:bodyPr wrap="square" lIns="0" tIns="0" rIns="0" bIns="0" rtlCol="0" anchor="ctr"/>
+          <a:lstStyle/>
+          <a:p>
+            <a:pPr indent="0" marL="0">
+              <a:lnSpc>
+                <a:spcPct val="118000"/>
+              </a:lnSpc>
+              <a:buNone/>
+            </a:pPr>
+            <a:r>
+              <a:rPr lang="en-US" sz="1700" dirty="0">
+                <a:solidFill>
+                  <a:srgbClr val="101828"/>
+                </a:solidFill>
+                <a:latin typeface="IBM Plex Sans" pitchFamily="34" charset="0"/>
+                <a:ea typeface="IBM Plex Sans" pitchFamily="34" charset="-122"/>
+                <a:cs typeface="IBM Plex Sans" pitchFamily="34" charset="-120"/>
+              </a:rPr>
+              <a:t>Write a program that reads a whole number and prints that many lines, the first holding one * character, the second two, and so on.</a:t>
+            </a:r>
+            <a:endParaRPr lang="en-US" sz="1700" dirty="0"/>
+          </a:p>
+        </p:txBody>
+      </p:sp>
+      <p:sp>
+        <p:nvSpPr>
+          <p:cNvPr id="17" name="Shape 15"/>
+          <p:cNvSpPr/>
+          <p:nvPr/>
+        </p:nvSpPr>
+        <p:spPr>
+          <a:xfrm>
+            <a:off x="10515600" y="4727448"/>
+            <a:ext cx="868680" cy="493776"/>
+          </a:xfrm>
+          <a:prstGeom prst="roundRect">
+            <a:avLst>
+              <a:gd name="adj" fmla="val 18519"/>
+            </a:avLst>
+          </a:prstGeom>
+          <a:solidFill>
+            <a:srgbClr val="EEF2FB"/>
+          </a:solidFill>
+          <a:ln/>
+        </p:spPr>
+      </p:sp>
+      <p:sp>
+        <p:nvSpPr>
+          <p:cNvPr id="18" name="Text 16"/>
+          <p:cNvSpPr txBox="1"/>
+          <p:nvPr/>
+        </p:nvSpPr>
+        <p:spPr>
+          <a:xfrm>
+            <a:off x="10515600" y="4727448"/>
+            <a:ext cx="868680" cy="493776"/>
+          </a:xfrm>
+          <a:prstGeom prst="rect">
+            <a:avLst/>
+          </a:prstGeom>
+          <a:noFill/>
+          <a:ln/>
+        </p:spPr>
+        <p:txBody>
+          <a:bodyPr wrap="square" lIns="0" tIns="0" rIns="0" bIns="0" rtlCol="0" anchor="ctr"/>
+          <a:lstStyle/>
+          <a:p>
+            <a:pPr algn="ctr" indent="0" marL="0">
+              <a:buNone/>
+            </a:pPr>
+            <a:r>
+              <a:rPr lang="en-US" sz="1500" b="1" dirty="0">
+                <a:solidFill>
+                  <a:srgbClr val="2D63FF"/>
+                </a:solidFill>
+                <a:latin typeface="IBM Plex Mono" pitchFamily="34" charset="0"/>
+                <a:ea typeface="IBM Plex Mono" pitchFamily="34" charset="-122"/>
+                <a:cs typeface="IBM Plex Mono" pitchFamily="34" charset="-120"/>
+              </a:rPr>
+              <a:t>[4]</a:t>
+            </a:r>
+            <a:endParaRPr lang="en-US" sz="1500" dirty="0"/>
+          </a:p>
+        </p:txBody>
+      </p:sp>
+    </p:spTree>
+  </p:cSld>
+  <p:clrMapOvr>
+    <a:masterClrMapping/>
+  </p:clrMapOvr>
+</p:sld>
+</file>
+
+<file path=ppt/slides/slide15.xml><?xml version="1.0" encoding="utf-8"?>
+<p:sld xmlns:a="http://schemas.openxmlformats.org/drawingml/2006/main" xmlns:r="http://schemas.openxmlformats.org/officeDocument/2006/relationships" xmlns:p="http://schemas.openxmlformats.org/presentationml/2006/main">
+  <p:cSld name="Slide 15">
     <p:bg>
       <p:bgPr>
         <a:solidFill>
